--- a/slides/Week4.pptx
+++ b/slides/Week4.pptx
@@ -1,6 +1,6 @@
 
 <file path=ppt/presentation.xml><?xml version="1.0" encoding="utf-8"?>
-<p:presentation xmlns:a="http://schemas.openxmlformats.org/drawingml/2006/main" xmlns:r="http://schemas.openxmlformats.org/officeDocument/2006/relationships" xmlns:p="http://schemas.openxmlformats.org/presentationml/2006/main" showSpecialPlsOnTitleSld="0" strictFirstAndLastChars="0" saveSubsetFonts="1">
+<p:presentation xmlns:a="http://schemas.openxmlformats.org/drawingml/2006/main" xmlns:r="http://schemas.openxmlformats.org/officeDocument/2006/relationships" xmlns:p="http://schemas.openxmlformats.org/presentationml/2006/main" showSpecialPlsOnTitleSld="0" strictFirstAndLastChars="0" embedTrueTypeFonts="1" saveSubsetFonts="1">
   <p:sldMasterIdLst>
     <p:sldMasterId id="2147485087" r:id="rId1"/>
   </p:sldMasterIdLst>
@@ -58,6 +58,14 @@
   </p:sldIdLst>
   <p:sldSz cx="9144000" cy="6858000" type="screen4x3"/>
   <p:notesSz cx="7010400" cy="9296400"/>
+  <p:embeddedFontLst>
+    <p:embeddedFont>
+      <p:font typeface="Garamond" panose="02020404030301010803" pitchFamily="18" charset="0"/>
+      <p:regular r:id="rId48"/>
+      <p:bold r:id="rId49"/>
+      <p:italic r:id="rId50"/>
+    </p:embeddedFont>
+  </p:embeddedFontLst>
   <p:defaultTextStyle>
     <a:defPPr>
       <a:defRPr lang="en-US"/>
@@ -220,7 +228,7 @@
 <p1510:revInfo xmlns:a="http://schemas.openxmlformats.org/drawingml/2006/main" xmlns:r="http://schemas.openxmlformats.org/officeDocument/2006/relationships" xmlns:p1510="http://schemas.microsoft.com/office/powerpoint/2015/10/main">
   <p1510:revLst>
     <p1510:client id="{0C4B56B2-0AC9-419B-98B8-F2427D5261EE}" v="9" dt="2026-02-02T05:01:32.261"/>
-    <p1510:client id="{0E204528-26D7-4103-8B75-616A575D54A4}" v="365" dt="2026-02-03T01:32:22.374"/>
+    <p1510:client id="{0E204528-26D7-4103-8B75-616A575D54A4}" v="386" dt="2026-02-03T04:08:38.868"/>
   </p1510:revLst>
 </p1510:revInfo>
 </file>
@@ -229,1186 +237,25 @@
 <pc:chgInfo xmlns:a="http://schemas.openxmlformats.org/drawingml/2006/main" xmlns:r="http://schemas.openxmlformats.org/officeDocument/2006/relationships" xmlns:ac="http://schemas.microsoft.com/office/drawing/2013/main/command" xmlns:pc="http://schemas.microsoft.com/office/powerpoint/2013/main/command">
   <pc:docChgLst>
     <pc:chgData name="Zhao Jin" userId="cd05a825-544c-438a-9ba1-08e63db50b47" providerId="ADAL" clId="{5DF3A229-1965-414E-AF54-F4C37AC7DF68}"/>
-    <pc:docChg chg="undo custSel addSld delSld modSld sldOrd">
-      <pc:chgData name="Zhao Jin" userId="cd05a825-544c-438a-9ba1-08e63db50b47" providerId="ADAL" clId="{5DF3A229-1965-414E-AF54-F4C37AC7DF68}" dt="2026-02-03T01:32:54.169" v="2345" actId="1076"/>
+    <pc:docChg chg="modSld">
+      <pc:chgData name="Zhao Jin" userId="cd05a825-544c-438a-9ba1-08e63db50b47" providerId="ADAL" clId="{5DF3A229-1965-414E-AF54-F4C37AC7DF68}" dt="2026-02-03T04:08:38.868" v="20"/>
       <pc:docMkLst>
         <pc:docMk/>
       </pc:docMkLst>
-      <pc:sldChg chg="modSp mod">
-        <pc:chgData name="Zhao Jin" userId="cd05a825-544c-438a-9ba1-08e63db50b47" providerId="ADAL" clId="{5DF3A229-1965-414E-AF54-F4C37AC7DF68}" dt="2026-02-02T08:02:27.163" v="1011"/>
-        <pc:sldMkLst>
-          <pc:docMk/>
-          <pc:sldMk cId="2775173622" sldId="524"/>
-        </pc:sldMkLst>
-        <pc:spChg chg="mod">
-          <ac:chgData name="Zhao Jin" userId="cd05a825-544c-438a-9ba1-08e63db50b47" providerId="ADAL" clId="{5DF3A229-1965-414E-AF54-F4C37AC7DF68}" dt="2026-02-02T08:02:27.163" v="1011"/>
-          <ac:spMkLst>
-            <pc:docMk/>
-            <pc:sldMk cId="2775173622" sldId="524"/>
-            <ac:spMk id="15" creationId="{00000000-0000-0000-0000-000000000000}"/>
-          </ac:spMkLst>
-        </pc:spChg>
-        <pc:spChg chg="mod">
-          <ac:chgData name="Zhao Jin" userId="cd05a825-544c-438a-9ba1-08e63db50b47" providerId="ADAL" clId="{5DF3A229-1965-414E-AF54-F4C37AC7DF68}" dt="2026-02-02T08:01:25.104" v="969" actId="20577"/>
-          <ac:spMkLst>
-            <pc:docMk/>
-            <pc:sldMk cId="2775173622" sldId="524"/>
-            <ac:spMk id="25602" creationId="{00000000-0000-0000-0000-000000000000}"/>
-          </ac:spMkLst>
-        </pc:spChg>
-        <pc:graphicFrameChg chg="mod">
-          <ac:chgData name="Zhao Jin" userId="cd05a825-544c-438a-9ba1-08e63db50b47" providerId="ADAL" clId="{5DF3A229-1965-414E-AF54-F4C37AC7DF68}" dt="2026-02-02T07:48:59.029" v="714" actId="1076"/>
-          <ac:graphicFrameMkLst>
-            <pc:docMk/>
-            <pc:sldMk cId="2775173622" sldId="524"/>
-            <ac:graphicFrameMk id="5" creationId="{9E742EBA-8F43-4310-AD68-B4660B9ECF59}"/>
-          </ac:graphicFrameMkLst>
-        </pc:graphicFrameChg>
-      </pc:sldChg>
-      <pc:sldChg chg="modSp mod ord">
-        <pc:chgData name="Zhao Jin" userId="cd05a825-544c-438a-9ba1-08e63db50b47" providerId="ADAL" clId="{5DF3A229-1965-414E-AF54-F4C37AC7DF68}" dt="2026-02-02T08:30:50.733" v="2127" actId="20577"/>
-        <pc:sldMkLst>
-          <pc:docMk/>
-          <pc:sldMk cId="1067695719" sldId="526"/>
-        </pc:sldMkLst>
-        <pc:spChg chg="mod">
-          <ac:chgData name="Zhao Jin" userId="cd05a825-544c-438a-9ba1-08e63db50b47" providerId="ADAL" clId="{5DF3A229-1965-414E-AF54-F4C37AC7DF68}" dt="2026-02-02T08:30:50.733" v="2127" actId="20577"/>
-          <ac:spMkLst>
-            <pc:docMk/>
-            <pc:sldMk cId="1067695719" sldId="526"/>
-            <ac:spMk id="13" creationId="{00000000-0000-0000-0000-000000000000}"/>
-          </ac:spMkLst>
-        </pc:spChg>
-      </pc:sldChg>
-      <pc:sldChg chg="addSp delSp modSp mod addAnim delAnim modAnim">
-        <pc:chgData name="Zhao Jin" userId="cd05a825-544c-438a-9ba1-08e63db50b47" providerId="ADAL" clId="{5DF3A229-1965-414E-AF54-F4C37AC7DF68}" dt="2026-02-03T01:18:39.867" v="2253" actId="1035"/>
-        <pc:sldMkLst>
-          <pc:docMk/>
-          <pc:sldMk cId="4228901100" sldId="545"/>
-        </pc:sldMkLst>
-        <pc:spChg chg="add mod">
-          <ac:chgData name="Zhao Jin" userId="cd05a825-544c-438a-9ba1-08e63db50b47" providerId="ADAL" clId="{5DF3A229-1965-414E-AF54-F4C37AC7DF68}" dt="2026-02-03T01:18:39.867" v="2253" actId="1035"/>
-          <ac:spMkLst>
-            <pc:docMk/>
-            <pc:sldMk cId="4228901100" sldId="545"/>
-            <ac:spMk id="2" creationId="{C430BB25-D09F-A523-35D9-970C4CEE73F3}"/>
-          </ac:spMkLst>
-        </pc:spChg>
-        <pc:spChg chg="add del mod">
-          <ac:chgData name="Zhao Jin" userId="cd05a825-544c-438a-9ba1-08e63db50b47" providerId="ADAL" clId="{5DF3A229-1965-414E-AF54-F4C37AC7DF68}" dt="2026-02-03T01:18:31.822" v="2202" actId="478"/>
-          <ac:spMkLst>
-            <pc:docMk/>
-            <pc:sldMk cId="4228901100" sldId="545"/>
-            <ac:spMk id="5" creationId="{BA3A70F0-C6B7-D127-9F4C-2084F40B8D7A}"/>
-          </ac:spMkLst>
-        </pc:spChg>
-        <pc:spChg chg="add del mod">
-          <ac:chgData name="Zhao Jin" userId="cd05a825-544c-438a-9ba1-08e63db50b47" providerId="ADAL" clId="{5DF3A229-1965-414E-AF54-F4C37AC7DF68}" dt="2026-02-02T07:12:38.715" v="231" actId="478"/>
-          <ac:spMkLst>
-            <pc:docMk/>
-            <pc:sldMk cId="4228901100" sldId="545"/>
-            <ac:spMk id="5" creationId="{E4C44F27-4940-F532-F6B6-DD062D475918}"/>
-          </ac:spMkLst>
-        </pc:spChg>
-        <pc:spChg chg="del mod">
-          <ac:chgData name="Zhao Jin" userId="cd05a825-544c-438a-9ba1-08e63db50b47" providerId="ADAL" clId="{5DF3A229-1965-414E-AF54-F4C37AC7DF68}" dt="2026-02-02T07:12:39.155" v="232" actId="478"/>
-          <ac:spMkLst>
-            <pc:docMk/>
-            <pc:sldMk cId="4228901100" sldId="545"/>
-            <ac:spMk id="6" creationId="{A5100F06-6042-1437-40DA-2F6B093C881B}"/>
-          </ac:spMkLst>
-        </pc:spChg>
-        <pc:spChg chg="add mod">
-          <ac:chgData name="Zhao Jin" userId="cd05a825-544c-438a-9ba1-08e63db50b47" providerId="ADAL" clId="{5DF3A229-1965-414E-AF54-F4C37AC7DF68}" dt="2026-02-02T07:24:27.547" v="360" actId="1037"/>
-          <ac:spMkLst>
-            <pc:docMk/>
-            <pc:sldMk cId="4228901100" sldId="545"/>
-            <ac:spMk id="7" creationId="{E93AEDB5-9B50-3563-1ABB-065030304271}"/>
-          </ac:spMkLst>
-        </pc:spChg>
-        <pc:spChg chg="mod">
-          <ac:chgData name="Zhao Jin" userId="cd05a825-544c-438a-9ba1-08e63db50b47" providerId="ADAL" clId="{5DF3A229-1965-414E-AF54-F4C37AC7DF68}" dt="2026-02-02T07:21:24.251" v="275"/>
-          <ac:spMkLst>
-            <pc:docMk/>
-            <pc:sldMk cId="4228901100" sldId="545"/>
-            <ac:spMk id="8" creationId="{00000000-0000-0000-0000-000000000000}"/>
-          </ac:spMkLst>
-        </pc:spChg>
-        <pc:spChg chg="mod">
-          <ac:chgData name="Zhao Jin" userId="cd05a825-544c-438a-9ba1-08e63db50b47" providerId="ADAL" clId="{5DF3A229-1965-414E-AF54-F4C37AC7DF68}" dt="2026-02-02T07:22:45.136" v="318" actId="20577"/>
-          <ac:spMkLst>
-            <pc:docMk/>
-            <pc:sldMk cId="4228901100" sldId="545"/>
-            <ac:spMk id="9" creationId="{00000000-0000-0000-0000-000000000000}"/>
-          </ac:spMkLst>
-        </pc:spChg>
-        <pc:spChg chg="mod">
-          <ac:chgData name="Zhao Jin" userId="cd05a825-544c-438a-9ba1-08e63db50b47" providerId="ADAL" clId="{5DF3A229-1965-414E-AF54-F4C37AC7DF68}" dt="2026-02-03T01:18:39.867" v="2253" actId="1035"/>
-          <ac:spMkLst>
-            <pc:docMk/>
-            <pc:sldMk cId="4228901100" sldId="545"/>
-            <ac:spMk id="10" creationId="{853A051E-3941-42AF-BD7D-94D3E7AB0C47}"/>
-          </ac:spMkLst>
-        </pc:spChg>
-      </pc:sldChg>
-      <pc:sldChg chg="addSp delSp modSp mod">
-        <pc:chgData name="Zhao Jin" userId="cd05a825-544c-438a-9ba1-08e63db50b47" providerId="ADAL" clId="{5DF3A229-1965-414E-AF54-F4C37AC7DF68}" dt="2026-02-02T08:10:45.280" v="1361" actId="478"/>
-        <pc:sldMkLst>
-          <pc:docMk/>
-          <pc:sldMk cId="1352675019" sldId="551"/>
-        </pc:sldMkLst>
-        <pc:spChg chg="add del mod">
-          <ac:chgData name="Zhao Jin" userId="cd05a825-544c-438a-9ba1-08e63db50b47" providerId="ADAL" clId="{5DF3A229-1965-414E-AF54-F4C37AC7DF68}" dt="2026-02-02T08:08:16.088" v="1208" actId="478"/>
-          <ac:spMkLst>
-            <pc:docMk/>
-            <pc:sldMk cId="1352675019" sldId="551"/>
-            <ac:spMk id="3" creationId="{D63806BC-6F7E-339B-9FE4-152BA12AD2D3}"/>
-          </ac:spMkLst>
-        </pc:spChg>
-        <pc:spChg chg="mod">
-          <ac:chgData name="Zhao Jin" userId="cd05a825-544c-438a-9ba1-08e63db50b47" providerId="ADAL" clId="{5DF3A229-1965-414E-AF54-F4C37AC7DF68}" dt="2026-02-02T08:10:13.881" v="1343" actId="20577"/>
-          <ac:spMkLst>
-            <pc:docMk/>
-            <pc:sldMk cId="1352675019" sldId="551"/>
-            <ac:spMk id="6" creationId="{8B5318D0-6DEE-69A5-0A15-62AA653F78D5}"/>
-          </ac:spMkLst>
-        </pc:spChg>
-        <pc:spChg chg="del mod">
-          <ac:chgData name="Zhao Jin" userId="cd05a825-544c-438a-9ba1-08e63db50b47" providerId="ADAL" clId="{5DF3A229-1965-414E-AF54-F4C37AC7DF68}" dt="2026-02-02T08:10:45.280" v="1361" actId="478"/>
-          <ac:spMkLst>
-            <pc:docMk/>
-            <pc:sldMk cId="1352675019" sldId="551"/>
-            <ac:spMk id="8" creationId="{8BE5A49A-2BE2-4466-6012-A263294A8A94}"/>
-          </ac:spMkLst>
-        </pc:spChg>
-        <pc:spChg chg="mod">
-          <ac:chgData name="Zhao Jin" userId="cd05a825-544c-438a-9ba1-08e63db50b47" providerId="ADAL" clId="{5DF3A229-1965-414E-AF54-F4C37AC7DF68}" dt="2026-02-02T08:08:05.055" v="1205" actId="20577"/>
-          <ac:spMkLst>
-            <pc:docMk/>
-            <pc:sldMk cId="1352675019" sldId="551"/>
-            <ac:spMk id="49" creationId="{00000000-0000-0000-0000-000000000000}"/>
-          </ac:spMkLst>
-        </pc:spChg>
-      </pc:sldChg>
-      <pc:sldChg chg="modSp">
-        <pc:chgData name="Zhao Jin" userId="cd05a825-544c-438a-9ba1-08e63db50b47" providerId="ADAL" clId="{5DF3A229-1965-414E-AF54-F4C37AC7DF68}" dt="2026-02-03T01:23:26.598" v="2271"/>
-        <pc:sldMkLst>
-          <pc:docMk/>
-          <pc:sldMk cId="3422194935" sldId="552"/>
-        </pc:sldMkLst>
-        <pc:spChg chg="mod">
-          <ac:chgData name="Zhao Jin" userId="cd05a825-544c-438a-9ba1-08e63db50b47" providerId="ADAL" clId="{5DF3A229-1965-414E-AF54-F4C37AC7DF68}" dt="2026-02-03T01:23:26.598" v="2271"/>
-          <ac:spMkLst>
-            <pc:docMk/>
-            <pc:sldMk cId="3422194935" sldId="552"/>
-            <ac:spMk id="14338" creationId="{00000000-0000-0000-0000-000000000000}"/>
-          </ac:spMkLst>
-        </pc:spChg>
-      </pc:sldChg>
-      <pc:sldChg chg="modSp">
-        <pc:chgData name="Zhao Jin" userId="cd05a825-544c-438a-9ba1-08e63db50b47" providerId="ADAL" clId="{5DF3A229-1965-414E-AF54-F4C37AC7DF68}" dt="2026-02-03T01:23:28.931" v="2272"/>
-        <pc:sldMkLst>
-          <pc:docMk/>
-          <pc:sldMk cId="1427618944" sldId="553"/>
-        </pc:sldMkLst>
-        <pc:spChg chg="mod">
-          <ac:chgData name="Zhao Jin" userId="cd05a825-544c-438a-9ba1-08e63db50b47" providerId="ADAL" clId="{5DF3A229-1965-414E-AF54-F4C37AC7DF68}" dt="2026-02-03T01:23:28.931" v="2272"/>
-          <ac:spMkLst>
-            <pc:docMk/>
-            <pc:sldMk cId="1427618944" sldId="553"/>
-            <ac:spMk id="14338" creationId="{00000000-0000-0000-0000-000000000000}"/>
-          </ac:spMkLst>
-        </pc:spChg>
-      </pc:sldChg>
-      <pc:sldChg chg="addSp modSp mod addAnim delAnim modAnim">
-        <pc:chgData name="Zhao Jin" userId="cd05a825-544c-438a-9ba1-08e63db50b47" providerId="ADAL" clId="{5DF3A229-1965-414E-AF54-F4C37AC7DF68}" dt="2026-02-02T07:29:34.863" v="576" actId="14100"/>
-        <pc:sldMkLst>
-          <pc:docMk/>
-          <pc:sldMk cId="182578491" sldId="559"/>
-        </pc:sldMkLst>
-        <pc:spChg chg="add mod">
-          <ac:chgData name="Zhao Jin" userId="cd05a825-544c-438a-9ba1-08e63db50b47" providerId="ADAL" clId="{5DF3A229-1965-414E-AF54-F4C37AC7DF68}" dt="2026-02-02T07:29:34.863" v="576" actId="14100"/>
-          <ac:spMkLst>
-            <pc:docMk/>
-            <pc:sldMk cId="182578491" sldId="559"/>
-            <ac:spMk id="5" creationId="{DFBF8873-784C-3D3D-078D-AC9D4EA614AB}"/>
-          </ac:spMkLst>
-        </pc:spChg>
-        <pc:spChg chg="add mod">
-          <ac:chgData name="Zhao Jin" userId="cd05a825-544c-438a-9ba1-08e63db50b47" providerId="ADAL" clId="{5DF3A229-1965-414E-AF54-F4C37AC7DF68}" dt="2026-02-02T07:26:30.696" v="478" actId="20577"/>
-          <ac:spMkLst>
-            <pc:docMk/>
-            <pc:sldMk cId="182578491" sldId="559"/>
-            <ac:spMk id="6" creationId="{A39E60C6-947F-E974-E248-30974618878C}"/>
-          </ac:spMkLst>
-        </pc:spChg>
-        <pc:spChg chg="add mod">
-          <ac:chgData name="Zhao Jin" userId="cd05a825-544c-438a-9ba1-08e63db50b47" providerId="ADAL" clId="{5DF3A229-1965-414E-AF54-F4C37AC7DF68}" dt="2026-02-02T07:26:50.992" v="496" actId="1037"/>
-          <ac:spMkLst>
-            <pc:docMk/>
-            <pc:sldMk cId="182578491" sldId="559"/>
-            <ac:spMk id="7" creationId="{CDB70797-3D34-15C4-4F0B-5BBC24394DCD}"/>
-          </ac:spMkLst>
-        </pc:spChg>
-        <pc:spChg chg="mod">
-          <ac:chgData name="Zhao Jin" userId="cd05a825-544c-438a-9ba1-08e63db50b47" providerId="ADAL" clId="{5DF3A229-1965-414E-AF54-F4C37AC7DF68}" dt="2026-02-02T07:27:32.049" v="559" actId="20577"/>
-          <ac:spMkLst>
-            <pc:docMk/>
-            <pc:sldMk cId="182578491" sldId="559"/>
-            <ac:spMk id="28" creationId="{206BF097-CD0C-4B25-AF09-C35109612BC3}"/>
-          </ac:spMkLst>
-        </pc:spChg>
-        <pc:spChg chg="mod">
-          <ac:chgData name="Zhao Jin" userId="cd05a825-544c-438a-9ba1-08e63db50b47" providerId="ADAL" clId="{5DF3A229-1965-414E-AF54-F4C37AC7DF68}" dt="2026-02-02T07:27:19.828" v="539" actId="20577"/>
-          <ac:spMkLst>
-            <pc:docMk/>
-            <pc:sldMk cId="182578491" sldId="559"/>
-            <ac:spMk id="49" creationId="{21EEE82A-4DB6-1D4F-9A03-5951F440FE93}"/>
-          </ac:spMkLst>
-        </pc:spChg>
-        <pc:picChg chg="mod">
-          <ac:chgData name="Zhao Jin" userId="cd05a825-544c-438a-9ba1-08e63db50b47" providerId="ADAL" clId="{5DF3A229-1965-414E-AF54-F4C37AC7DF68}" dt="2026-02-02T07:25:31.588" v="412" actId="1076"/>
-          <ac:picMkLst>
-            <pc:docMk/>
-            <pc:sldMk cId="182578491" sldId="559"/>
-            <ac:picMk id="1026" creationId="{F8944A42-B2D9-76AF-B07D-1AA4828E88A9}"/>
-          </ac:picMkLst>
-        </pc:picChg>
-      </pc:sldChg>
-      <pc:sldChg chg="modAnim">
-        <pc:chgData name="Zhao Jin" userId="cd05a825-544c-438a-9ba1-08e63db50b47" providerId="ADAL" clId="{5DF3A229-1965-414E-AF54-F4C37AC7DF68}" dt="2026-02-02T08:18:59.483" v="1698"/>
-        <pc:sldMkLst>
-          <pc:docMk/>
-          <pc:sldMk cId="1986771488" sldId="561"/>
-        </pc:sldMkLst>
-      </pc:sldChg>
-      <pc:sldChg chg="modSp mod">
-        <pc:chgData name="Zhao Jin" userId="cd05a825-544c-438a-9ba1-08e63db50b47" providerId="ADAL" clId="{5DF3A229-1965-414E-AF54-F4C37AC7DF68}" dt="2026-02-02T07:42:00.349" v="691" actId="1036"/>
-        <pc:sldMkLst>
-          <pc:docMk/>
-          <pc:sldMk cId="2739484572" sldId="562"/>
-        </pc:sldMkLst>
-        <pc:spChg chg="mod">
-          <ac:chgData name="Zhao Jin" userId="cd05a825-544c-438a-9ba1-08e63db50b47" providerId="ADAL" clId="{5DF3A229-1965-414E-AF54-F4C37AC7DF68}" dt="2026-02-02T07:41:49.276" v="655"/>
-          <ac:spMkLst>
-            <pc:docMk/>
-            <pc:sldMk cId="2739484572" sldId="562"/>
-            <ac:spMk id="8" creationId="{00000000-0000-0000-0000-000000000000}"/>
-          </ac:spMkLst>
-        </pc:spChg>
-        <pc:spChg chg="mod">
-          <ac:chgData name="Zhao Jin" userId="cd05a825-544c-438a-9ba1-08e63db50b47" providerId="ADAL" clId="{5DF3A229-1965-414E-AF54-F4C37AC7DF68}" dt="2026-02-02T07:42:00.349" v="691" actId="1036"/>
-          <ac:spMkLst>
-            <pc:docMk/>
-            <pc:sldMk cId="2739484572" sldId="562"/>
-            <ac:spMk id="10" creationId="{5FC71EA0-86D0-4839-B226-F2F72C7F52C6}"/>
-          </ac:spMkLst>
-        </pc:spChg>
-        <pc:spChg chg="mod">
-          <ac:chgData name="Zhao Jin" userId="cd05a825-544c-438a-9ba1-08e63db50b47" providerId="ADAL" clId="{5DF3A229-1965-414E-AF54-F4C37AC7DF68}" dt="2026-02-02T07:42:00.349" v="691" actId="1036"/>
-          <ac:spMkLst>
-            <pc:docMk/>
-            <pc:sldMk cId="2739484572" sldId="562"/>
-            <ac:spMk id="11" creationId="{BC839910-3DED-4F3B-ACBB-949AD3823840}"/>
-          </ac:spMkLst>
-        </pc:spChg>
-        <pc:spChg chg="mod">
-          <ac:chgData name="Zhao Jin" userId="cd05a825-544c-438a-9ba1-08e63db50b47" providerId="ADAL" clId="{5DF3A229-1965-414E-AF54-F4C37AC7DF68}" dt="2026-02-02T07:41:55.752" v="687" actId="1035"/>
-          <ac:spMkLst>
-            <pc:docMk/>
-            <pc:sldMk cId="2739484572" sldId="562"/>
-            <ac:spMk id="13" creationId="{EEB4DC09-7671-4533-8E46-5F36009B0FDA}"/>
-          </ac:spMkLst>
-        </pc:spChg>
-        <pc:spChg chg="mod">
-          <ac:chgData name="Zhao Jin" userId="cd05a825-544c-438a-9ba1-08e63db50b47" providerId="ADAL" clId="{5DF3A229-1965-414E-AF54-F4C37AC7DF68}" dt="2026-02-02T07:41:55.752" v="687" actId="1035"/>
-          <ac:spMkLst>
-            <pc:docMk/>
-            <pc:sldMk cId="2739484572" sldId="562"/>
-            <ac:spMk id="15" creationId="{A66B4139-5576-4648-BE53-3803BE78ABCA}"/>
-          </ac:spMkLst>
-        </pc:spChg>
-      </pc:sldChg>
-      <pc:sldChg chg="modSp mod addAnim delAnim modAnim">
-        <pc:chgData name="Zhao Jin" userId="cd05a825-544c-438a-9ba1-08e63db50b47" providerId="ADAL" clId="{5DF3A229-1965-414E-AF54-F4C37AC7DF68}" dt="2026-02-02T08:01:39.840" v="989" actId="20577"/>
-        <pc:sldMkLst>
-          <pc:docMk/>
-          <pc:sldMk cId="243231529" sldId="563"/>
-        </pc:sldMkLst>
-        <pc:spChg chg="mod">
-          <ac:chgData name="Zhao Jin" userId="cd05a825-544c-438a-9ba1-08e63db50b47" providerId="ADAL" clId="{5DF3A229-1965-414E-AF54-F4C37AC7DF68}" dt="2026-02-02T07:58:14.971" v="899" actId="207"/>
-          <ac:spMkLst>
-            <pc:docMk/>
-            <pc:sldMk cId="243231529" sldId="563"/>
-            <ac:spMk id="15" creationId="{00000000-0000-0000-0000-000000000000}"/>
-          </ac:spMkLst>
-        </pc:spChg>
-        <pc:spChg chg="mod">
-          <ac:chgData name="Zhao Jin" userId="cd05a825-544c-438a-9ba1-08e63db50b47" providerId="ADAL" clId="{5DF3A229-1965-414E-AF54-F4C37AC7DF68}" dt="2026-02-02T08:01:39.840" v="989" actId="20577"/>
-          <ac:spMkLst>
-            <pc:docMk/>
-            <pc:sldMk cId="243231529" sldId="563"/>
-            <ac:spMk id="25602" creationId="{00000000-0000-0000-0000-000000000000}"/>
-          </ac:spMkLst>
-        </pc:spChg>
-      </pc:sldChg>
-      <pc:sldChg chg="modSp mod addAnim delAnim modAnim">
-        <pc:chgData name="Zhao Jin" userId="cd05a825-544c-438a-9ba1-08e63db50b47" providerId="ADAL" clId="{5DF3A229-1965-414E-AF54-F4C37AC7DF68}" dt="2026-02-02T08:01:45.566" v="991"/>
+      <pc:sldChg chg="modSp modAnim">
+        <pc:chgData name="Zhao Jin" userId="cd05a825-544c-438a-9ba1-08e63db50b47" providerId="ADAL" clId="{5DF3A229-1965-414E-AF54-F4C37AC7DF68}" dt="2026-02-03T04:08:38.868" v="20"/>
         <pc:sldMkLst>
           <pc:docMk/>
           <pc:sldMk cId="29094273" sldId="564"/>
         </pc:sldMkLst>
         <pc:spChg chg="mod">
-          <ac:chgData name="Zhao Jin" userId="cd05a825-544c-438a-9ba1-08e63db50b47" providerId="ADAL" clId="{5DF3A229-1965-414E-AF54-F4C37AC7DF68}" dt="2026-02-02T07:59:14.441" v="908" actId="20577"/>
+          <ac:chgData name="Zhao Jin" userId="cd05a825-544c-438a-9ba1-08e63db50b47" providerId="ADAL" clId="{5DF3A229-1965-414E-AF54-F4C37AC7DF68}" dt="2026-02-03T04:08:38.868" v="20"/>
           <ac:spMkLst>
             <pc:docMk/>
             <pc:sldMk cId="29094273" sldId="564"/>
             <ac:spMk id="15" creationId="{A575D17D-3536-460E-088D-619F54BF1ECF}"/>
           </ac:spMkLst>
         </pc:spChg>
-        <pc:spChg chg="mod">
-          <ac:chgData name="Zhao Jin" userId="cd05a825-544c-438a-9ba1-08e63db50b47" providerId="ADAL" clId="{5DF3A229-1965-414E-AF54-F4C37AC7DF68}" dt="2026-02-02T08:01:45.566" v="991"/>
-          <ac:spMkLst>
-            <pc:docMk/>
-            <pc:sldMk cId="29094273" sldId="564"/>
-            <ac:spMk id="25602" creationId="{F9C8D923-E032-8407-5DC4-4A74B5336A18}"/>
-          </ac:spMkLst>
-        </pc:spChg>
-      </pc:sldChg>
-      <pc:sldChg chg="modSp add del mod">
-        <pc:chgData name="Zhao Jin" userId="cd05a825-544c-438a-9ba1-08e63db50b47" providerId="ADAL" clId="{5DF3A229-1965-414E-AF54-F4C37AC7DF68}" dt="2026-02-02T08:01:48.402" v="992"/>
-        <pc:sldMkLst>
-          <pc:docMk/>
-          <pc:sldMk cId="4003524798" sldId="565"/>
-        </pc:sldMkLst>
-        <pc:spChg chg="mod">
-          <ac:chgData name="Zhao Jin" userId="cd05a825-544c-438a-9ba1-08e63db50b47" providerId="ADAL" clId="{5DF3A229-1965-414E-AF54-F4C37AC7DF68}" dt="2026-02-02T07:59:59.340" v="961" actId="20577"/>
-          <ac:spMkLst>
-            <pc:docMk/>
-            <pc:sldMk cId="4003524798" sldId="565"/>
-            <ac:spMk id="15" creationId="{F746E238-A1EF-3DEC-227A-53382854B07D}"/>
-          </ac:spMkLst>
-        </pc:spChg>
-        <pc:spChg chg="mod">
-          <ac:chgData name="Zhao Jin" userId="cd05a825-544c-438a-9ba1-08e63db50b47" providerId="ADAL" clId="{5DF3A229-1965-414E-AF54-F4C37AC7DF68}" dt="2026-02-02T08:01:48.402" v="992"/>
-          <ac:spMkLst>
-            <pc:docMk/>
-            <pc:sldMk cId="4003524798" sldId="565"/>
-            <ac:spMk id="25602" creationId="{B6864DA0-78E9-93B1-166C-263248CFF6C4}"/>
-          </ac:spMkLst>
-        </pc:spChg>
-      </pc:sldChg>
-      <pc:sldChg chg="addSp delSp modSp mod">
-        <pc:chgData name="Zhao Jin" userId="cd05a825-544c-438a-9ba1-08e63db50b47" providerId="ADAL" clId="{5DF3A229-1965-414E-AF54-F4C37AC7DF68}" dt="2026-02-03T01:16:15.492" v="2130" actId="478"/>
-        <pc:sldMkLst>
-          <pc:docMk/>
-          <pc:sldMk cId="3787536361" sldId="567"/>
-        </pc:sldMkLst>
-        <pc:spChg chg="add del mod">
-          <ac:chgData name="Zhao Jin" userId="cd05a825-544c-438a-9ba1-08e63db50b47" providerId="ADAL" clId="{5DF3A229-1965-414E-AF54-F4C37AC7DF68}" dt="2026-02-03T01:16:15.492" v="2130" actId="478"/>
-          <ac:spMkLst>
-            <pc:docMk/>
-            <pc:sldMk cId="3787536361" sldId="567"/>
-            <ac:spMk id="5" creationId="{29EE37E0-B2B5-640A-1DCB-A2DB5D68A361}"/>
-          </ac:spMkLst>
-        </pc:spChg>
-      </pc:sldChg>
-      <pc:sldChg chg="addSp modSp mod">
-        <pc:chgData name="Zhao Jin" userId="cd05a825-544c-438a-9ba1-08e63db50b47" providerId="ADAL" clId="{5DF3A229-1965-414E-AF54-F4C37AC7DF68}" dt="2026-02-03T01:23:13.063" v="2268"/>
-        <pc:sldMkLst>
-          <pc:docMk/>
-          <pc:sldMk cId="1424500846" sldId="571"/>
-        </pc:sldMkLst>
-        <pc:spChg chg="mod">
-          <ac:chgData name="Zhao Jin" userId="cd05a825-544c-438a-9ba1-08e63db50b47" providerId="ADAL" clId="{5DF3A229-1965-414E-AF54-F4C37AC7DF68}" dt="2026-02-03T01:23:12.458" v="2267" actId="20577"/>
-          <ac:spMkLst>
-            <pc:docMk/>
-            <pc:sldMk cId="1424500846" sldId="571"/>
-            <ac:spMk id="14338" creationId="{EE987993-DE1D-F29E-7138-D50B0A09638E}"/>
-          </ac:spMkLst>
-        </pc:spChg>
-        <pc:cxnChg chg="add mod">
-          <ac:chgData name="Zhao Jin" userId="cd05a825-544c-438a-9ba1-08e63db50b47" providerId="ADAL" clId="{5DF3A229-1965-414E-AF54-F4C37AC7DF68}" dt="2026-02-03T01:23:13.063" v="2268"/>
-          <ac:cxnSpMkLst>
-            <pc:docMk/>
-            <pc:sldMk cId="1424500846" sldId="571"/>
-            <ac:cxnSpMk id="5" creationId="{306F2BA9-4BCD-7037-9769-3A11561911B0}"/>
-          </ac:cxnSpMkLst>
-        </pc:cxnChg>
-      </pc:sldChg>
-      <pc:sldChg chg="modSp">
-        <pc:chgData name="Zhao Jin" userId="cd05a825-544c-438a-9ba1-08e63db50b47" providerId="ADAL" clId="{5DF3A229-1965-414E-AF54-F4C37AC7DF68}" dt="2026-02-03T01:23:20.268" v="2269"/>
-        <pc:sldMkLst>
-          <pc:docMk/>
-          <pc:sldMk cId="1811060557" sldId="572"/>
-        </pc:sldMkLst>
-        <pc:spChg chg="mod">
-          <ac:chgData name="Zhao Jin" userId="cd05a825-544c-438a-9ba1-08e63db50b47" providerId="ADAL" clId="{5DF3A229-1965-414E-AF54-F4C37AC7DF68}" dt="2026-02-03T01:23:20.268" v="2269"/>
-          <ac:spMkLst>
-            <pc:docMk/>
-            <pc:sldMk cId="1811060557" sldId="572"/>
-            <ac:spMk id="14338" creationId="{E2EBEC03-983B-55ED-9299-62840F847E2E}"/>
-          </ac:spMkLst>
-        </pc:spChg>
-      </pc:sldChg>
-      <pc:sldChg chg="modSp">
-        <pc:chgData name="Zhao Jin" userId="cd05a825-544c-438a-9ba1-08e63db50b47" providerId="ADAL" clId="{5DF3A229-1965-414E-AF54-F4C37AC7DF68}" dt="2026-02-03T01:23:23.197" v="2270"/>
-        <pc:sldMkLst>
-          <pc:docMk/>
-          <pc:sldMk cId="3505552737" sldId="574"/>
-        </pc:sldMkLst>
-        <pc:spChg chg="mod">
-          <ac:chgData name="Zhao Jin" userId="cd05a825-544c-438a-9ba1-08e63db50b47" providerId="ADAL" clId="{5DF3A229-1965-414E-AF54-F4C37AC7DF68}" dt="2026-02-03T01:23:23.197" v="2270"/>
-          <ac:spMkLst>
-            <pc:docMk/>
-            <pc:sldMk cId="3505552737" sldId="574"/>
-            <ac:spMk id="14338" creationId="{5EBE07AF-FA80-24C4-AA32-FBE3BBE5A139}"/>
-          </ac:spMkLst>
-        </pc:spChg>
-      </pc:sldChg>
-      <pc:sldChg chg="modSp mod">
-        <pc:chgData name="Zhao Jin" userId="cd05a825-544c-438a-9ba1-08e63db50b47" providerId="ADAL" clId="{5DF3A229-1965-414E-AF54-F4C37AC7DF68}" dt="2026-02-02T08:19:49.819" v="1715" actId="20577"/>
-        <pc:sldMkLst>
-          <pc:docMk/>
-          <pc:sldMk cId="3226898961" sldId="581"/>
-        </pc:sldMkLst>
-        <pc:spChg chg="mod">
-          <ac:chgData name="Zhao Jin" userId="cd05a825-544c-438a-9ba1-08e63db50b47" providerId="ADAL" clId="{5DF3A229-1965-414E-AF54-F4C37AC7DF68}" dt="2026-02-02T08:19:49.819" v="1715" actId="20577"/>
-          <ac:spMkLst>
-            <pc:docMk/>
-            <pc:sldMk cId="3226898961" sldId="581"/>
-            <ac:spMk id="16" creationId="{D2096CE0-F283-4186-90FF-7C54FF151885}"/>
-          </ac:spMkLst>
-        </pc:spChg>
-      </pc:sldChg>
-      <pc:sldChg chg="modSp mod">
-        <pc:chgData name="Zhao Jin" userId="cd05a825-544c-438a-9ba1-08e63db50b47" providerId="ADAL" clId="{5DF3A229-1965-414E-AF54-F4C37AC7DF68}" dt="2026-02-02T08:20:31.934" v="1730" actId="20577"/>
-        <pc:sldMkLst>
-          <pc:docMk/>
-          <pc:sldMk cId="3003604107" sldId="586"/>
-        </pc:sldMkLst>
-        <pc:spChg chg="mod">
-          <ac:chgData name="Zhao Jin" userId="cd05a825-544c-438a-9ba1-08e63db50b47" providerId="ADAL" clId="{5DF3A229-1965-414E-AF54-F4C37AC7DF68}" dt="2026-02-02T08:20:31.934" v="1730" actId="20577"/>
-          <ac:spMkLst>
-            <pc:docMk/>
-            <pc:sldMk cId="3003604107" sldId="586"/>
-            <ac:spMk id="9" creationId="{BB45AA11-5681-47FB-AA94-C76223DE9352}"/>
-          </ac:spMkLst>
-        </pc:spChg>
-      </pc:sldChg>
-      <pc:sldChg chg="modSp mod ord">
-        <pc:chgData name="Zhao Jin" userId="cd05a825-544c-438a-9ba1-08e63db50b47" providerId="ADAL" clId="{5DF3A229-1965-414E-AF54-F4C37AC7DF68}" dt="2026-02-02T08:18:14.698" v="1693" actId="20577"/>
-        <pc:sldMkLst>
-          <pc:docMk/>
-          <pc:sldMk cId="1995785936" sldId="587"/>
-        </pc:sldMkLst>
-        <pc:spChg chg="mod">
-          <ac:chgData name="Zhao Jin" userId="cd05a825-544c-438a-9ba1-08e63db50b47" providerId="ADAL" clId="{5DF3A229-1965-414E-AF54-F4C37AC7DF68}" dt="2026-02-02T08:18:14.698" v="1693" actId="20577"/>
-          <ac:spMkLst>
-            <pc:docMk/>
-            <pc:sldMk cId="1995785936" sldId="587"/>
-            <ac:spMk id="10" creationId="{894B1072-3BEE-F43A-C490-D398E036CCCB}"/>
-          </ac:spMkLst>
-        </pc:spChg>
-        <pc:spChg chg="mod">
-          <ac:chgData name="Zhao Jin" userId="cd05a825-544c-438a-9ba1-08e63db50b47" providerId="ADAL" clId="{5DF3A229-1965-414E-AF54-F4C37AC7DF68}" dt="2026-02-02T08:13:32.912" v="1503" actId="20577"/>
-          <ac:spMkLst>
-            <pc:docMk/>
-            <pc:sldMk cId="1995785936" sldId="587"/>
-            <ac:spMk id="49" creationId="{70165A59-6BD3-85B1-CAE7-AB63B0DF10C5}"/>
-          </ac:spMkLst>
-        </pc:spChg>
-      </pc:sldChg>
-      <pc:sldChg chg="addSp delSp modSp mod addAnim delAnim modAnim">
-        <pc:chgData name="Zhao Jin" userId="cd05a825-544c-438a-9ba1-08e63db50b47" providerId="ADAL" clId="{5DF3A229-1965-414E-AF54-F4C37AC7DF68}" dt="2026-02-02T07:09:52.262" v="192" actId="207"/>
-        <pc:sldMkLst>
-          <pc:docMk/>
-          <pc:sldMk cId="4215052344" sldId="589"/>
-        </pc:sldMkLst>
-        <pc:spChg chg="mod">
-          <ac:chgData name="Zhao Jin" userId="cd05a825-544c-438a-9ba1-08e63db50b47" providerId="ADAL" clId="{5DF3A229-1965-414E-AF54-F4C37AC7DF68}" dt="2026-02-02T06:53:53.892" v="6" actId="20577"/>
-          <ac:spMkLst>
-            <pc:docMk/>
-            <pc:sldMk cId="4215052344" sldId="589"/>
-            <ac:spMk id="8" creationId="{2DB8C0DD-2610-48AA-A2F1-A9AE4DD922BA}"/>
-          </ac:spMkLst>
-        </pc:spChg>
-        <pc:spChg chg="mod">
-          <ac:chgData name="Zhao Jin" userId="cd05a825-544c-438a-9ba1-08e63db50b47" providerId="ADAL" clId="{5DF3A229-1965-414E-AF54-F4C37AC7DF68}" dt="2026-02-02T07:09:52.262" v="192" actId="207"/>
-          <ac:spMkLst>
-            <pc:docMk/>
-            <pc:sldMk cId="4215052344" sldId="589"/>
-            <ac:spMk id="11" creationId="{B69F7285-C8C7-8E85-61C5-8F1DCAE8C22B}"/>
-          </ac:spMkLst>
-        </pc:spChg>
-        <pc:spChg chg="mod">
-          <ac:chgData name="Zhao Jin" userId="cd05a825-544c-438a-9ba1-08e63db50b47" providerId="ADAL" clId="{5DF3A229-1965-414E-AF54-F4C37AC7DF68}" dt="2026-02-02T07:05:39.921" v="190" actId="1076"/>
-          <ac:spMkLst>
-            <pc:docMk/>
-            <pc:sldMk cId="4215052344" sldId="589"/>
-            <ac:spMk id="13" creationId="{EE9B5801-BF4A-1160-C1E7-97E4CA9192EE}"/>
-          </ac:spMkLst>
-        </pc:spChg>
-        <pc:picChg chg="add del mod">
-          <ac:chgData name="Zhao Jin" userId="cd05a825-544c-438a-9ba1-08e63db50b47" providerId="ADAL" clId="{5DF3A229-1965-414E-AF54-F4C37AC7DF68}" dt="2026-02-02T07:05:43.019" v="191" actId="1076"/>
-          <ac:picMkLst>
-            <pc:docMk/>
-            <pc:sldMk cId="4215052344" sldId="589"/>
-            <ac:picMk id="4" creationId="{FD43DD06-20C4-7DD3-ECFF-66D5992031B1}"/>
-          </ac:picMkLst>
-        </pc:picChg>
-      </pc:sldChg>
-      <pc:sldChg chg="addSp modSp add mod ord">
-        <pc:chgData name="Zhao Jin" userId="cd05a825-544c-438a-9ba1-08e63db50b47" providerId="ADAL" clId="{5DF3A229-1965-414E-AF54-F4C37AC7DF68}" dt="2026-02-02T08:17:53.935" v="1690"/>
-        <pc:sldMkLst>
-          <pc:docMk/>
-          <pc:sldMk cId="1088988995" sldId="590"/>
-        </pc:sldMkLst>
-        <pc:spChg chg="add mod">
-          <ac:chgData name="Zhao Jin" userId="cd05a825-544c-438a-9ba1-08e63db50b47" providerId="ADAL" clId="{5DF3A229-1965-414E-AF54-F4C37AC7DF68}" dt="2026-02-02T08:17:23.041" v="1688" actId="1076"/>
-          <ac:spMkLst>
-            <pc:docMk/>
-            <pc:sldMk cId="1088988995" sldId="590"/>
-            <ac:spMk id="3" creationId="{B848BCD4-36CD-6F11-10FE-AC3E7C0052AE}"/>
-          </ac:spMkLst>
-        </pc:spChg>
-        <pc:spChg chg="mod">
-          <ac:chgData name="Zhao Jin" userId="cd05a825-544c-438a-9ba1-08e63db50b47" providerId="ADAL" clId="{5DF3A229-1965-414E-AF54-F4C37AC7DF68}" dt="2026-02-02T08:16:53.444" v="1661" actId="20577"/>
-          <ac:spMkLst>
-            <pc:docMk/>
-            <pc:sldMk cId="1088988995" sldId="590"/>
-            <ac:spMk id="10" creationId="{BDF91877-0BB3-2658-FDDA-8185BBC3E8BD}"/>
-          </ac:spMkLst>
-        </pc:spChg>
-        <pc:spChg chg="mod">
-          <ac:chgData name="Zhao Jin" userId="cd05a825-544c-438a-9ba1-08e63db50b47" providerId="ADAL" clId="{5DF3A229-1965-414E-AF54-F4C37AC7DF68}" dt="2026-02-02T08:15:41.199" v="1592" actId="207"/>
-          <ac:spMkLst>
-            <pc:docMk/>
-            <pc:sldMk cId="1088988995" sldId="590"/>
-            <ac:spMk id="49" creationId="{825CC811-2C14-A9B3-C5C0-BCA858FBD1A2}"/>
-          </ac:spMkLst>
-        </pc:spChg>
-      </pc:sldChg>
-      <pc:sldChg chg="delSp add del mod delAnim">
-        <pc:chgData name="Zhao Jin" userId="cd05a825-544c-438a-9ba1-08e63db50b47" providerId="ADAL" clId="{5DF3A229-1965-414E-AF54-F4C37AC7DF68}" dt="2026-02-02T07:13:17.389" v="253" actId="47"/>
-        <pc:sldMkLst>
-          <pc:docMk/>
-          <pc:sldMk cId="3127558365" sldId="590"/>
-        </pc:sldMkLst>
-        <pc:spChg chg="del">
-          <ac:chgData name="Zhao Jin" userId="cd05a825-544c-438a-9ba1-08e63db50b47" providerId="ADAL" clId="{5DF3A229-1965-414E-AF54-F4C37AC7DF68}" dt="2026-02-02T07:11:49.691" v="197" actId="478"/>
-          <ac:spMkLst>
-            <pc:docMk/>
-            <pc:sldMk cId="3127558365" sldId="590"/>
-            <ac:spMk id="5" creationId="{CE74F389-965C-18E4-232F-E00A701029FB}"/>
-          </ac:spMkLst>
-        </pc:spChg>
-      </pc:sldChg>
-      <pc:sldChg chg="add del">
-        <pc:chgData name="Zhao Jin" userId="cd05a825-544c-438a-9ba1-08e63db50b47" providerId="ADAL" clId="{5DF3A229-1965-414E-AF54-F4C37AC7DF68}" dt="2026-02-02T08:14:15.196" v="1506" actId="47"/>
-        <pc:sldMkLst>
-          <pc:docMk/>
-          <pc:sldMk cId="1195652927" sldId="591"/>
-        </pc:sldMkLst>
-      </pc:sldChg>
-      <pc:sldChg chg="del">
-        <pc:chgData name="Zhao Jin" userId="cd05a825-544c-438a-9ba1-08e63db50b47" providerId="ADAL" clId="{5DF3A229-1965-414E-AF54-F4C37AC7DF68}" dt="2026-02-02T08:06:31.382" v="1050" actId="47"/>
-        <pc:sldMkLst>
-          <pc:docMk/>
-          <pc:sldMk cId="2303550913" sldId="591"/>
-        </pc:sldMkLst>
-      </pc:sldChg>
-      <pc:sldChg chg="modSp add mod">
-        <pc:chgData name="Zhao Jin" userId="cd05a825-544c-438a-9ba1-08e63db50b47" providerId="ADAL" clId="{5DF3A229-1965-414E-AF54-F4C37AC7DF68}" dt="2026-02-02T08:25:37.862" v="2049" actId="20577"/>
-        <pc:sldMkLst>
-          <pc:docMk/>
-          <pc:sldMk cId="3194704825" sldId="591"/>
-        </pc:sldMkLst>
-        <pc:spChg chg="mod">
-          <ac:chgData name="Zhao Jin" userId="cd05a825-544c-438a-9ba1-08e63db50b47" providerId="ADAL" clId="{5DF3A229-1965-414E-AF54-F4C37AC7DF68}" dt="2026-02-02T08:25:37.862" v="2049" actId="20577"/>
-          <ac:spMkLst>
-            <pc:docMk/>
-            <pc:sldMk cId="3194704825" sldId="591"/>
-            <ac:spMk id="13" creationId="{11FE8A1E-D5F0-27BC-233F-FE7290546998}"/>
-          </ac:spMkLst>
-        </pc:spChg>
-      </pc:sldChg>
-      <pc:sldChg chg="addSp delSp modSp add mod ord delAnim modAnim">
-        <pc:chgData name="Zhao Jin" userId="cd05a825-544c-438a-9ba1-08e63db50b47" providerId="ADAL" clId="{5DF3A229-1965-414E-AF54-F4C37AC7DF68}" dt="2026-02-03T01:18:03.858" v="2201" actId="1035"/>
-        <pc:sldMkLst>
-          <pc:docMk/>
-          <pc:sldMk cId="3605365676" sldId="592"/>
-        </pc:sldMkLst>
-        <pc:spChg chg="del">
-          <ac:chgData name="Zhao Jin" userId="cd05a825-544c-438a-9ba1-08e63db50b47" providerId="ADAL" clId="{5DF3A229-1965-414E-AF54-F4C37AC7DF68}" dt="2026-02-03T01:17:29.823" v="2184" actId="478"/>
-          <ac:spMkLst>
-            <pc:docMk/>
-            <pc:sldMk cId="3605365676" sldId="592"/>
-            <ac:spMk id="2" creationId="{62C3802B-9B75-2EF8-E885-CEBC60817A66}"/>
-          </ac:spMkLst>
-        </pc:spChg>
-        <pc:spChg chg="mod">
-          <ac:chgData name="Zhao Jin" userId="cd05a825-544c-438a-9ba1-08e63db50b47" providerId="ADAL" clId="{5DF3A229-1965-414E-AF54-F4C37AC7DF68}" dt="2026-02-03T01:17:21.340" v="2183" actId="20577"/>
-          <ac:spMkLst>
-            <pc:docMk/>
-            <pc:sldMk cId="3605365676" sldId="592"/>
-            <ac:spMk id="5" creationId="{18FF495B-EF8C-46B1-BAF5-26225ACE1ABA}"/>
-          </ac:spMkLst>
-        </pc:spChg>
-        <pc:spChg chg="add mod">
-          <ac:chgData name="Zhao Jin" userId="cd05a825-544c-438a-9ba1-08e63db50b47" providerId="ADAL" clId="{5DF3A229-1965-414E-AF54-F4C37AC7DF68}" dt="2026-02-03T01:18:01.762" v="2197" actId="1035"/>
-          <ac:spMkLst>
-            <pc:docMk/>
-            <pc:sldMk cId="3605365676" sldId="592"/>
-            <ac:spMk id="6" creationId="{E5DAE8D6-648B-9E6C-0FFD-2EFB83426A7E}"/>
-          </ac:spMkLst>
-        </pc:spChg>
-        <pc:spChg chg="del">
-          <ac:chgData name="Zhao Jin" userId="cd05a825-544c-438a-9ba1-08e63db50b47" providerId="ADAL" clId="{5DF3A229-1965-414E-AF54-F4C37AC7DF68}" dt="2026-02-03T01:17:29.823" v="2184" actId="478"/>
-          <ac:spMkLst>
-            <pc:docMk/>
-            <pc:sldMk cId="3605365676" sldId="592"/>
-            <ac:spMk id="10" creationId="{D050ACC2-5871-F05F-545F-8ACBFB29ECFA}"/>
-          </ac:spMkLst>
-        </pc:spChg>
-        <pc:spChg chg="add mod">
-          <ac:chgData name="Zhao Jin" userId="cd05a825-544c-438a-9ba1-08e63db50b47" providerId="ADAL" clId="{5DF3A229-1965-414E-AF54-F4C37AC7DF68}" dt="2026-02-03T01:18:03.858" v="2201" actId="1035"/>
-          <ac:spMkLst>
-            <pc:docMk/>
-            <pc:sldMk cId="3605365676" sldId="592"/>
-            <ac:spMk id="11" creationId="{E91B98F9-B6BE-B32C-F018-DA940ADBCE27}"/>
-          </ac:spMkLst>
-        </pc:spChg>
-      </pc:sldChg>
-      <pc:sldChg chg="addSp delSp modSp add mod">
-        <pc:chgData name="Zhao Jin" userId="cd05a825-544c-438a-9ba1-08e63db50b47" providerId="ADAL" clId="{5DF3A229-1965-414E-AF54-F4C37AC7DF68}" dt="2026-02-03T01:31:04.859" v="2320"/>
-        <pc:sldMkLst>
-          <pc:docMk/>
-          <pc:sldMk cId="454245071" sldId="593"/>
-        </pc:sldMkLst>
-        <pc:spChg chg="add mod">
-          <ac:chgData name="Zhao Jin" userId="cd05a825-544c-438a-9ba1-08e63db50b47" providerId="ADAL" clId="{5DF3A229-1965-414E-AF54-F4C37AC7DF68}" dt="2026-02-03T01:24:30.611" v="2275"/>
-          <ac:spMkLst>
-            <pc:docMk/>
-            <pc:sldMk cId="454245071" sldId="593"/>
-            <ac:spMk id="4" creationId="{8CD10472-261B-4103-2C91-AFC497DBEA10}"/>
-          </ac:spMkLst>
-        </pc:spChg>
-        <pc:spChg chg="del">
-          <ac:chgData name="Zhao Jin" userId="cd05a825-544c-438a-9ba1-08e63db50b47" providerId="ADAL" clId="{5DF3A229-1965-414E-AF54-F4C37AC7DF68}" dt="2026-02-03T01:24:29.060" v="2274" actId="478"/>
-          <ac:spMkLst>
-            <pc:docMk/>
-            <pc:sldMk cId="454245071" sldId="593"/>
-            <ac:spMk id="7" creationId="{C642E6CE-BBCE-A605-7E82-3F00A3EAD963}"/>
-          </ac:spMkLst>
-        </pc:spChg>
-        <pc:spChg chg="add del mod">
-          <ac:chgData name="Zhao Jin" userId="cd05a825-544c-438a-9ba1-08e63db50b47" providerId="ADAL" clId="{5DF3A229-1965-414E-AF54-F4C37AC7DF68}" dt="2026-02-03T01:24:38.063" v="2279" actId="478"/>
-          <ac:spMkLst>
-            <pc:docMk/>
-            <pc:sldMk cId="454245071" sldId="593"/>
-            <ac:spMk id="9" creationId="{C011C88E-23B4-0EFF-BF67-98918EBBDD54}"/>
-          </ac:spMkLst>
-        </pc:spChg>
-        <pc:spChg chg="add mod">
-          <ac:chgData name="Zhao Jin" userId="cd05a825-544c-438a-9ba1-08e63db50b47" providerId="ADAL" clId="{5DF3A229-1965-414E-AF54-F4C37AC7DF68}" dt="2026-02-03T01:24:30.611" v="2275"/>
-          <ac:spMkLst>
-            <pc:docMk/>
-            <pc:sldMk cId="454245071" sldId="593"/>
-            <ac:spMk id="10" creationId="{5D13DB88-AB6F-7002-08FA-87859F2CF13C}"/>
-          </ac:spMkLst>
-        </pc:spChg>
-        <pc:spChg chg="add del mod">
-          <ac:chgData name="Zhao Jin" userId="cd05a825-544c-438a-9ba1-08e63db50b47" providerId="ADAL" clId="{5DF3A229-1965-414E-AF54-F4C37AC7DF68}" dt="2026-02-03T01:24:38.478" v="2281" actId="478"/>
-          <ac:spMkLst>
-            <pc:docMk/>
-            <pc:sldMk cId="454245071" sldId="593"/>
-            <ac:spMk id="11" creationId="{D8CC073E-64F8-A741-BA8F-BB4CABBF23A2}"/>
-          </ac:spMkLst>
-        </pc:spChg>
-        <pc:spChg chg="add del mod">
-          <ac:chgData name="Zhao Jin" userId="cd05a825-544c-438a-9ba1-08e63db50b47" providerId="ADAL" clId="{5DF3A229-1965-414E-AF54-F4C37AC7DF68}" dt="2026-02-03T01:24:38.280" v="2280" actId="478"/>
-          <ac:spMkLst>
-            <pc:docMk/>
-            <pc:sldMk cId="454245071" sldId="593"/>
-            <ac:spMk id="13" creationId="{FDF61C89-1F28-82DE-7320-D229641557CD}"/>
-          </ac:spMkLst>
-        </pc:spChg>
-        <pc:spChg chg="add del mod">
-          <ac:chgData name="Zhao Jin" userId="cd05a825-544c-438a-9ba1-08e63db50b47" providerId="ADAL" clId="{5DF3A229-1965-414E-AF54-F4C37AC7DF68}" dt="2026-02-03T01:24:56.838" v="2283" actId="478"/>
-          <ac:spMkLst>
-            <pc:docMk/>
-            <pc:sldMk cId="454245071" sldId="593"/>
-            <ac:spMk id="16" creationId="{A842B78B-6D8A-EB57-ED78-7B7A02849498}"/>
-          </ac:spMkLst>
-        </pc:spChg>
-        <pc:spChg chg="add del mod">
-          <ac:chgData name="Zhao Jin" userId="cd05a825-544c-438a-9ba1-08e63db50b47" providerId="ADAL" clId="{5DF3A229-1965-414E-AF54-F4C37AC7DF68}" dt="2026-02-03T01:24:56.838" v="2283" actId="478"/>
-          <ac:spMkLst>
-            <pc:docMk/>
-            <pc:sldMk cId="454245071" sldId="593"/>
-            <ac:spMk id="21" creationId="{30566EE7-188D-6971-CB9E-115A92B4A8C8}"/>
-          </ac:spMkLst>
-        </pc:spChg>
-        <pc:spChg chg="add del mod">
-          <ac:chgData name="Zhao Jin" userId="cd05a825-544c-438a-9ba1-08e63db50b47" providerId="ADAL" clId="{5DF3A229-1965-414E-AF54-F4C37AC7DF68}" dt="2026-02-03T01:24:56.838" v="2283" actId="478"/>
-          <ac:spMkLst>
-            <pc:docMk/>
-            <pc:sldMk cId="454245071" sldId="593"/>
-            <ac:spMk id="22" creationId="{70F2670E-3406-B275-5AA0-69DBE6335E64}"/>
-          </ac:spMkLst>
-        </pc:spChg>
-        <pc:spChg chg="add del mod">
-          <ac:chgData name="Zhao Jin" userId="cd05a825-544c-438a-9ba1-08e63db50b47" providerId="ADAL" clId="{5DF3A229-1965-414E-AF54-F4C37AC7DF68}" dt="2026-02-03T01:24:56.838" v="2283" actId="478"/>
-          <ac:spMkLst>
-            <pc:docMk/>
-            <pc:sldMk cId="454245071" sldId="593"/>
-            <ac:spMk id="23" creationId="{0FF2F8D7-2D8D-46B3-23A6-50695B1D936D}"/>
-          </ac:spMkLst>
-        </pc:spChg>
-        <pc:spChg chg="add del mod">
-          <ac:chgData name="Zhao Jin" userId="cd05a825-544c-438a-9ba1-08e63db50b47" providerId="ADAL" clId="{5DF3A229-1965-414E-AF54-F4C37AC7DF68}" dt="2026-02-03T01:24:56.838" v="2283" actId="478"/>
-          <ac:spMkLst>
-            <pc:docMk/>
-            <pc:sldMk cId="454245071" sldId="593"/>
-            <ac:spMk id="25" creationId="{9CC3EF82-F459-2E82-DECD-0A780DC7AB0C}"/>
-          </ac:spMkLst>
-        </pc:spChg>
-        <pc:spChg chg="add mod">
-          <ac:chgData name="Zhao Jin" userId="cd05a825-544c-438a-9ba1-08e63db50b47" providerId="ADAL" clId="{5DF3A229-1965-414E-AF54-F4C37AC7DF68}" dt="2026-02-03T01:25:01.822" v="2285"/>
-          <ac:spMkLst>
-            <pc:docMk/>
-            <pc:sldMk cId="454245071" sldId="593"/>
-            <ac:spMk id="29" creationId="{9538F4B2-74CA-0FB7-B3FF-B033B309532A}"/>
-          </ac:spMkLst>
-        </pc:spChg>
-        <pc:spChg chg="add mod">
-          <ac:chgData name="Zhao Jin" userId="cd05a825-544c-438a-9ba1-08e63db50b47" providerId="ADAL" clId="{5DF3A229-1965-414E-AF54-F4C37AC7DF68}" dt="2026-02-03T01:25:01.822" v="2285"/>
-          <ac:spMkLst>
-            <pc:docMk/>
-            <pc:sldMk cId="454245071" sldId="593"/>
-            <ac:spMk id="33" creationId="{291D5409-25BD-5AFA-D98B-3288B0991CE8}"/>
-          </ac:spMkLst>
-        </pc:spChg>
-        <pc:spChg chg="add mod">
-          <ac:chgData name="Zhao Jin" userId="cd05a825-544c-438a-9ba1-08e63db50b47" providerId="ADAL" clId="{5DF3A229-1965-414E-AF54-F4C37AC7DF68}" dt="2026-02-03T01:25:01.822" v="2285"/>
-          <ac:spMkLst>
-            <pc:docMk/>
-            <pc:sldMk cId="454245071" sldId="593"/>
-            <ac:spMk id="35" creationId="{75D41EF0-65B0-A048-7080-C4498F8DCE77}"/>
-          </ac:spMkLst>
-        </pc:spChg>
-        <pc:spChg chg="add mod">
-          <ac:chgData name="Zhao Jin" userId="cd05a825-544c-438a-9ba1-08e63db50b47" providerId="ADAL" clId="{5DF3A229-1965-414E-AF54-F4C37AC7DF68}" dt="2026-02-03T01:25:01.822" v="2285"/>
-          <ac:spMkLst>
-            <pc:docMk/>
-            <pc:sldMk cId="454245071" sldId="593"/>
-            <ac:spMk id="36" creationId="{A5776E19-67E6-05E3-C929-90AB5F0C4EF5}"/>
-          </ac:spMkLst>
-        </pc:spChg>
-        <pc:spChg chg="add mod">
-          <ac:chgData name="Zhao Jin" userId="cd05a825-544c-438a-9ba1-08e63db50b47" providerId="ADAL" clId="{5DF3A229-1965-414E-AF54-F4C37AC7DF68}" dt="2026-02-03T01:25:01.822" v="2285"/>
-          <ac:spMkLst>
-            <pc:docMk/>
-            <pc:sldMk cId="454245071" sldId="593"/>
-            <ac:spMk id="37" creationId="{B60B0949-62FB-F9EB-10A6-0789C0A63AC0}"/>
-          </ac:spMkLst>
-        </pc:spChg>
-        <pc:spChg chg="add mod">
-          <ac:chgData name="Zhao Jin" userId="cd05a825-544c-438a-9ba1-08e63db50b47" providerId="ADAL" clId="{5DF3A229-1965-414E-AF54-F4C37AC7DF68}" dt="2026-02-03T01:25:01.822" v="2285"/>
-          <ac:spMkLst>
-            <pc:docMk/>
-            <pc:sldMk cId="454245071" sldId="593"/>
-            <ac:spMk id="39" creationId="{018EF377-B9D7-CE81-43E9-E48405E0AA1B}"/>
-          </ac:spMkLst>
-        </pc:spChg>
-        <pc:spChg chg="mod">
-          <ac:chgData name="Zhao Jin" userId="cd05a825-544c-438a-9ba1-08e63db50b47" providerId="ADAL" clId="{5DF3A229-1965-414E-AF54-F4C37AC7DF68}" dt="2026-02-03T01:31:04.859" v="2320"/>
-          <ac:spMkLst>
-            <pc:docMk/>
-            <pc:sldMk cId="454245071" sldId="593"/>
-            <ac:spMk id="14338" creationId="{05070490-126B-D196-0B69-DC44A9ED3C62}"/>
-          </ac:spMkLst>
-        </pc:spChg>
-        <pc:picChg chg="add mod">
-          <ac:chgData name="Zhao Jin" userId="cd05a825-544c-438a-9ba1-08e63db50b47" providerId="ADAL" clId="{5DF3A229-1965-414E-AF54-F4C37AC7DF68}" dt="2026-02-03T01:24:30.611" v="2275"/>
-          <ac:picMkLst>
-            <pc:docMk/>
-            <pc:sldMk cId="454245071" sldId="593"/>
-            <ac:picMk id="5" creationId="{5FCA1F06-EE97-488D-9018-BC95AF86F419}"/>
-          </ac:picMkLst>
-        </pc:picChg>
-        <pc:picChg chg="add mod">
-          <ac:chgData name="Zhao Jin" userId="cd05a825-544c-438a-9ba1-08e63db50b47" providerId="ADAL" clId="{5DF3A229-1965-414E-AF54-F4C37AC7DF68}" dt="2026-02-03T01:24:30.611" v="2275"/>
-          <ac:picMkLst>
-            <pc:docMk/>
-            <pc:sldMk cId="454245071" sldId="593"/>
-            <ac:picMk id="6" creationId="{569FB188-F4CF-B429-E9E3-ED7EB0A31C14}"/>
-          </ac:picMkLst>
-        </pc:picChg>
-        <pc:picChg chg="add mod">
-          <ac:chgData name="Zhao Jin" userId="cd05a825-544c-438a-9ba1-08e63db50b47" providerId="ADAL" clId="{5DF3A229-1965-414E-AF54-F4C37AC7DF68}" dt="2026-02-03T01:24:30.611" v="2275"/>
-          <ac:picMkLst>
-            <pc:docMk/>
-            <pc:sldMk cId="454245071" sldId="593"/>
-            <ac:picMk id="8" creationId="{49AFED0F-E523-EC82-C457-8805AEC287BF}"/>
-          </ac:picMkLst>
-        </pc:picChg>
-        <pc:picChg chg="add mod">
-          <ac:chgData name="Zhao Jin" userId="cd05a825-544c-438a-9ba1-08e63db50b47" providerId="ADAL" clId="{5DF3A229-1965-414E-AF54-F4C37AC7DF68}" dt="2026-02-03T01:24:30.611" v="2275"/>
-          <ac:picMkLst>
-            <pc:docMk/>
-            <pc:sldMk cId="454245071" sldId="593"/>
-            <ac:picMk id="12" creationId="{F15C47AF-71D3-1C25-2E6F-C4C9FC18A0E9}"/>
-          </ac:picMkLst>
-        </pc:picChg>
-        <pc:picChg chg="add mod">
-          <ac:chgData name="Zhao Jin" userId="cd05a825-544c-438a-9ba1-08e63db50b47" providerId="ADAL" clId="{5DF3A229-1965-414E-AF54-F4C37AC7DF68}" dt="2026-02-03T01:24:30.611" v="2275"/>
-          <ac:picMkLst>
-            <pc:docMk/>
-            <pc:sldMk cId="454245071" sldId="593"/>
-            <ac:picMk id="14" creationId="{C6EA2E70-7DE4-2646-0776-36969F67A4AA}"/>
-          </ac:picMkLst>
-        </pc:picChg>
-        <pc:picChg chg="add del mod">
-          <ac:chgData name="Zhao Jin" userId="cd05a825-544c-438a-9ba1-08e63db50b47" providerId="ADAL" clId="{5DF3A229-1965-414E-AF54-F4C37AC7DF68}" dt="2026-02-03T01:24:56.838" v="2283" actId="478"/>
-          <ac:picMkLst>
-            <pc:docMk/>
-            <pc:sldMk cId="454245071" sldId="593"/>
-            <ac:picMk id="17" creationId="{78F7AA0A-C9B2-A5FE-58EE-CD346CFAA0D5}"/>
-          </ac:picMkLst>
-        </pc:picChg>
-        <pc:picChg chg="del">
-          <ac:chgData name="Zhao Jin" userId="cd05a825-544c-438a-9ba1-08e63db50b47" providerId="ADAL" clId="{5DF3A229-1965-414E-AF54-F4C37AC7DF68}" dt="2026-02-03T01:24:56.838" v="2283" actId="478"/>
-          <ac:picMkLst>
-            <pc:docMk/>
-            <pc:sldMk cId="454245071" sldId="593"/>
-            <ac:picMk id="18" creationId="{755399D5-1192-CB8F-CA9C-9267DD7D7E35}"/>
-          </ac:picMkLst>
-        </pc:picChg>
-        <pc:picChg chg="add del mod">
-          <ac:chgData name="Zhao Jin" userId="cd05a825-544c-438a-9ba1-08e63db50b47" providerId="ADAL" clId="{5DF3A229-1965-414E-AF54-F4C37AC7DF68}" dt="2026-02-03T01:24:56.838" v="2283" actId="478"/>
-          <ac:picMkLst>
-            <pc:docMk/>
-            <pc:sldMk cId="454245071" sldId="593"/>
-            <ac:picMk id="19" creationId="{4FBFDD91-ADB2-4FA6-49F9-6D5A20308A25}"/>
-          </ac:picMkLst>
-        </pc:picChg>
-        <pc:picChg chg="add mod">
-          <ac:chgData name="Zhao Jin" userId="cd05a825-544c-438a-9ba1-08e63db50b47" providerId="ADAL" clId="{5DF3A229-1965-414E-AF54-F4C37AC7DF68}" dt="2026-02-03T01:24:45.672" v="2282"/>
-          <ac:picMkLst>
-            <pc:docMk/>
-            <pc:sldMk cId="454245071" sldId="593"/>
-            <ac:picMk id="20" creationId="{23C36EEC-0289-6F20-E928-C4B3D7D2837F}"/>
-          </ac:picMkLst>
-        </pc:picChg>
-        <pc:picChg chg="add del mod">
-          <ac:chgData name="Zhao Jin" userId="cd05a825-544c-438a-9ba1-08e63db50b47" providerId="ADAL" clId="{5DF3A229-1965-414E-AF54-F4C37AC7DF68}" dt="2026-02-03T01:24:56.838" v="2283" actId="478"/>
-          <ac:picMkLst>
-            <pc:docMk/>
-            <pc:sldMk cId="454245071" sldId="593"/>
-            <ac:picMk id="24" creationId="{872002FA-FB60-A384-91A7-C5AFAA1CE55E}"/>
-          </ac:picMkLst>
-        </pc:picChg>
-        <pc:picChg chg="add del mod">
-          <ac:chgData name="Zhao Jin" userId="cd05a825-544c-438a-9ba1-08e63db50b47" providerId="ADAL" clId="{5DF3A229-1965-414E-AF54-F4C37AC7DF68}" dt="2026-02-03T01:24:56.838" v="2283" actId="478"/>
-          <ac:picMkLst>
-            <pc:docMk/>
-            <pc:sldMk cId="454245071" sldId="593"/>
-            <ac:picMk id="26" creationId="{9ACAA5CA-3211-7086-58F1-EA0FD4EB664F}"/>
-          </ac:picMkLst>
-        </pc:picChg>
-        <pc:picChg chg="add">
-          <ac:chgData name="Zhao Jin" userId="cd05a825-544c-438a-9ba1-08e63db50b47" providerId="ADAL" clId="{5DF3A229-1965-414E-AF54-F4C37AC7DF68}" dt="2026-02-03T01:24:58.567" v="2284"/>
-          <ac:picMkLst>
-            <pc:docMk/>
-            <pc:sldMk cId="454245071" sldId="593"/>
-            <ac:picMk id="28" creationId="{7E01ABA6-AC49-5A35-980D-494368EFD8C9}"/>
-          </ac:picMkLst>
-        </pc:picChg>
-        <pc:picChg chg="add mod">
-          <ac:chgData name="Zhao Jin" userId="cd05a825-544c-438a-9ba1-08e63db50b47" providerId="ADAL" clId="{5DF3A229-1965-414E-AF54-F4C37AC7DF68}" dt="2026-02-03T01:25:01.822" v="2285"/>
-          <ac:picMkLst>
-            <pc:docMk/>
-            <pc:sldMk cId="454245071" sldId="593"/>
-            <ac:picMk id="31" creationId="{E2819C33-C89D-580F-F1E0-299ECB0097B9}"/>
-          </ac:picMkLst>
-        </pc:picChg>
-        <pc:picChg chg="add mod">
-          <ac:chgData name="Zhao Jin" userId="cd05a825-544c-438a-9ba1-08e63db50b47" providerId="ADAL" clId="{5DF3A229-1965-414E-AF54-F4C37AC7DF68}" dt="2026-02-03T01:25:01.822" v="2285"/>
-          <ac:picMkLst>
-            <pc:docMk/>
-            <pc:sldMk cId="454245071" sldId="593"/>
-            <ac:picMk id="34" creationId="{36BD74BB-EB92-AEED-4F21-1AF50F55E238}"/>
-          </ac:picMkLst>
-        </pc:picChg>
-        <pc:picChg chg="add mod">
-          <ac:chgData name="Zhao Jin" userId="cd05a825-544c-438a-9ba1-08e63db50b47" providerId="ADAL" clId="{5DF3A229-1965-414E-AF54-F4C37AC7DF68}" dt="2026-02-03T01:25:01.822" v="2285"/>
-          <ac:picMkLst>
-            <pc:docMk/>
-            <pc:sldMk cId="454245071" sldId="593"/>
-            <ac:picMk id="38" creationId="{CFAAE80F-B63F-E574-DC63-A42FEFBDA9A7}"/>
-          </ac:picMkLst>
-        </pc:picChg>
-        <pc:picChg chg="add mod">
-          <ac:chgData name="Zhao Jin" userId="cd05a825-544c-438a-9ba1-08e63db50b47" providerId="ADAL" clId="{5DF3A229-1965-414E-AF54-F4C37AC7DF68}" dt="2026-02-03T01:25:01.822" v="2285"/>
-          <ac:picMkLst>
-            <pc:docMk/>
-            <pc:sldMk cId="454245071" sldId="593"/>
-            <ac:picMk id="40" creationId="{55BA049E-DC34-DC26-8C27-DF7416D2EE31}"/>
-          </ac:picMkLst>
-        </pc:picChg>
-        <pc:picChg chg="add del mod">
-          <ac:chgData name="Zhao Jin" userId="cd05a825-544c-438a-9ba1-08e63db50b47" providerId="ADAL" clId="{5DF3A229-1965-414E-AF54-F4C37AC7DF68}" dt="2026-02-03T01:30:42.918" v="2289" actId="21"/>
-          <ac:picMkLst>
-            <pc:docMk/>
-            <pc:sldMk cId="454245071" sldId="593"/>
-            <ac:picMk id="1026" creationId="{5BB9991F-93BD-7BDA-0AC0-B78980A45314}"/>
-          </ac:picMkLst>
-        </pc:picChg>
-        <pc:picChg chg="del">
-          <ac:chgData name="Zhao Jin" userId="cd05a825-544c-438a-9ba1-08e63db50b47" providerId="ADAL" clId="{5DF3A229-1965-414E-AF54-F4C37AC7DF68}" dt="2026-02-03T01:24:29.060" v="2274" actId="478"/>
-          <ac:picMkLst>
-            <pc:docMk/>
-            <pc:sldMk cId="454245071" sldId="593"/>
-            <ac:picMk id="14337" creationId="{3EEBCFFA-8048-0D37-DCD3-C7E42C77D132}"/>
-          </ac:picMkLst>
-        </pc:picChg>
-      </pc:sldChg>
-      <pc:sldChg chg="addSp delSp modSp add mod">
-        <pc:chgData name="Zhao Jin" userId="cd05a825-544c-438a-9ba1-08e63db50b47" providerId="ADAL" clId="{5DF3A229-1965-414E-AF54-F4C37AC7DF68}" dt="2026-02-03T01:32:54.169" v="2345" actId="1076"/>
-        <pc:sldMkLst>
-          <pc:docMk/>
-          <pc:sldMk cId="570786809" sldId="594"/>
-        </pc:sldMkLst>
-        <pc:spChg chg="del">
-          <ac:chgData name="Zhao Jin" userId="cd05a825-544c-438a-9ba1-08e63db50b47" providerId="ADAL" clId="{5DF3A229-1965-414E-AF54-F4C37AC7DF68}" dt="2026-02-03T01:30:58.851" v="2319" actId="478"/>
-          <ac:spMkLst>
-            <pc:docMk/>
-            <pc:sldMk cId="570786809" sldId="594"/>
-            <ac:spMk id="29" creationId="{37A44762-82C7-2D6C-17BA-58F1A43176FF}"/>
-          </ac:spMkLst>
-        </pc:spChg>
-        <pc:spChg chg="del">
-          <ac:chgData name="Zhao Jin" userId="cd05a825-544c-438a-9ba1-08e63db50b47" providerId="ADAL" clId="{5DF3A229-1965-414E-AF54-F4C37AC7DF68}" dt="2026-02-03T01:30:58.851" v="2319" actId="478"/>
-          <ac:spMkLst>
-            <pc:docMk/>
-            <pc:sldMk cId="570786809" sldId="594"/>
-            <ac:spMk id="33" creationId="{39199E23-B54B-74B2-3703-DA542CC987ED}"/>
-          </ac:spMkLst>
-        </pc:spChg>
-        <pc:spChg chg="del">
-          <ac:chgData name="Zhao Jin" userId="cd05a825-544c-438a-9ba1-08e63db50b47" providerId="ADAL" clId="{5DF3A229-1965-414E-AF54-F4C37AC7DF68}" dt="2026-02-03T01:30:58.851" v="2319" actId="478"/>
-          <ac:spMkLst>
-            <pc:docMk/>
-            <pc:sldMk cId="570786809" sldId="594"/>
-            <ac:spMk id="35" creationId="{5EC11EEF-90A4-0645-3E90-93B78680F2FB}"/>
-          </ac:spMkLst>
-        </pc:spChg>
-        <pc:spChg chg="del">
-          <ac:chgData name="Zhao Jin" userId="cd05a825-544c-438a-9ba1-08e63db50b47" providerId="ADAL" clId="{5DF3A229-1965-414E-AF54-F4C37AC7DF68}" dt="2026-02-03T01:30:58.851" v="2319" actId="478"/>
-          <ac:spMkLst>
-            <pc:docMk/>
-            <pc:sldMk cId="570786809" sldId="594"/>
-            <ac:spMk id="36" creationId="{75FAD32B-4F3E-D193-281F-1B9326A741E6}"/>
-          </ac:spMkLst>
-        </pc:spChg>
-        <pc:spChg chg="del">
-          <ac:chgData name="Zhao Jin" userId="cd05a825-544c-438a-9ba1-08e63db50b47" providerId="ADAL" clId="{5DF3A229-1965-414E-AF54-F4C37AC7DF68}" dt="2026-02-03T01:30:58.851" v="2319" actId="478"/>
-          <ac:spMkLst>
-            <pc:docMk/>
-            <pc:sldMk cId="570786809" sldId="594"/>
-            <ac:spMk id="37" creationId="{556CAB21-1726-DA78-19D1-989D971E74AC}"/>
-          </ac:spMkLst>
-        </pc:spChg>
-        <pc:spChg chg="del">
-          <ac:chgData name="Zhao Jin" userId="cd05a825-544c-438a-9ba1-08e63db50b47" providerId="ADAL" clId="{5DF3A229-1965-414E-AF54-F4C37AC7DF68}" dt="2026-02-03T01:30:58.851" v="2319" actId="478"/>
-          <ac:spMkLst>
-            <pc:docMk/>
-            <pc:sldMk cId="570786809" sldId="594"/>
-            <ac:spMk id="39" creationId="{06B67729-FFDA-ECFD-0305-CDC3D9C72963}"/>
-          </ac:spMkLst>
-        </pc:spChg>
-        <pc:spChg chg="mod">
-          <ac:chgData name="Zhao Jin" userId="cd05a825-544c-438a-9ba1-08e63db50b47" providerId="ADAL" clId="{5DF3A229-1965-414E-AF54-F4C37AC7DF68}" dt="2026-02-03T01:31:10.215" v="2321"/>
-          <ac:spMkLst>
-            <pc:docMk/>
-            <pc:sldMk cId="570786809" sldId="594"/>
-            <ac:spMk id="14338" creationId="{5BF1BDB8-4614-7F18-BA4A-2DAAEC710EA2}"/>
-          </ac:spMkLst>
-        </pc:spChg>
-        <pc:picChg chg="add mod modCrop">
-          <ac:chgData name="Zhao Jin" userId="cd05a825-544c-438a-9ba1-08e63db50b47" providerId="ADAL" clId="{5DF3A229-1965-414E-AF54-F4C37AC7DF68}" dt="2026-02-03T01:32:45.690" v="2343" actId="1076"/>
-          <ac:picMkLst>
-            <pc:docMk/>
-            <pc:sldMk cId="570786809" sldId="594"/>
-            <ac:picMk id="5" creationId="{15D5B158-D824-5EBF-3F26-44ACFE3FC988}"/>
-          </ac:picMkLst>
-        </pc:picChg>
-        <pc:picChg chg="add del mod">
-          <ac:chgData name="Zhao Jin" userId="cd05a825-544c-438a-9ba1-08e63db50b47" providerId="ADAL" clId="{5DF3A229-1965-414E-AF54-F4C37AC7DF68}" dt="2026-02-03T01:32:20.436" v="2335" actId="478"/>
-          <ac:picMkLst>
-            <pc:docMk/>
-            <pc:sldMk cId="570786809" sldId="594"/>
-            <ac:picMk id="7" creationId="{31E9C6F0-9368-56DB-914C-5A3B5B43211E}"/>
-          </ac:picMkLst>
-        </pc:picChg>
-        <pc:picChg chg="add mod">
-          <ac:chgData name="Zhao Jin" userId="cd05a825-544c-438a-9ba1-08e63db50b47" providerId="ADAL" clId="{5DF3A229-1965-414E-AF54-F4C37AC7DF68}" dt="2026-02-03T01:32:54.169" v="2345" actId="1076"/>
-          <ac:picMkLst>
-            <pc:docMk/>
-            <pc:sldMk cId="570786809" sldId="594"/>
-            <ac:picMk id="9" creationId="{91567818-D88F-A28D-70E1-C900AAD0D0C0}"/>
-          </ac:picMkLst>
-        </pc:picChg>
-        <pc:picChg chg="del">
-          <ac:chgData name="Zhao Jin" userId="cd05a825-544c-438a-9ba1-08e63db50b47" providerId="ADAL" clId="{5DF3A229-1965-414E-AF54-F4C37AC7DF68}" dt="2026-02-03T01:30:58.851" v="2319" actId="478"/>
-          <ac:picMkLst>
-            <pc:docMk/>
-            <pc:sldMk cId="570786809" sldId="594"/>
-            <ac:picMk id="30" creationId="{DA8C32C4-86BD-AE08-FA56-52107F2E9229}"/>
-          </ac:picMkLst>
-        </pc:picChg>
-        <pc:picChg chg="del">
-          <ac:chgData name="Zhao Jin" userId="cd05a825-544c-438a-9ba1-08e63db50b47" providerId="ADAL" clId="{5DF3A229-1965-414E-AF54-F4C37AC7DF68}" dt="2026-02-03T01:30:58.851" v="2319" actId="478"/>
-          <ac:picMkLst>
-            <pc:docMk/>
-            <pc:sldMk cId="570786809" sldId="594"/>
-            <ac:picMk id="32" creationId="{A4E4053C-CC45-B699-1C13-8D73EECAFA24}"/>
-          </ac:picMkLst>
-        </pc:picChg>
-        <pc:picChg chg="del">
-          <ac:chgData name="Zhao Jin" userId="cd05a825-544c-438a-9ba1-08e63db50b47" providerId="ADAL" clId="{5DF3A229-1965-414E-AF54-F4C37AC7DF68}" dt="2026-02-03T01:30:58.851" v="2319" actId="478"/>
-          <ac:picMkLst>
-            <pc:docMk/>
-            <pc:sldMk cId="570786809" sldId="594"/>
-            <ac:picMk id="38" creationId="{6BC81FE0-BDFF-9A85-9888-5AA339393454}"/>
-          </ac:picMkLst>
-        </pc:picChg>
-        <pc:picChg chg="del">
-          <ac:chgData name="Zhao Jin" userId="cd05a825-544c-438a-9ba1-08e63db50b47" providerId="ADAL" clId="{5DF3A229-1965-414E-AF54-F4C37AC7DF68}" dt="2026-02-03T01:30:58.851" v="2319" actId="478"/>
-          <ac:picMkLst>
-            <pc:docMk/>
-            <pc:sldMk cId="570786809" sldId="594"/>
-            <ac:picMk id="40" creationId="{4AFD32CD-8E78-F53F-7A30-D833292032C0}"/>
-          </ac:picMkLst>
-        </pc:picChg>
-        <pc:picChg chg="add del mod">
-          <ac:chgData name="Zhao Jin" userId="cd05a825-544c-438a-9ba1-08e63db50b47" providerId="ADAL" clId="{5DF3A229-1965-414E-AF54-F4C37AC7DF68}" dt="2026-02-03T01:31:32.747" v="2325" actId="478"/>
-          <ac:picMkLst>
-            <pc:docMk/>
-            <pc:sldMk cId="570786809" sldId="594"/>
-            <ac:picMk id="2050" creationId="{673C1241-E8A9-0BC1-59DB-FD54FF5BA007}"/>
-          </ac:picMkLst>
-        </pc:picChg>
-      </pc:sldChg>
-      <pc:sldChg chg="add del">
-        <pc:chgData name="Zhao Jin" userId="cd05a825-544c-438a-9ba1-08e63db50b47" providerId="ADAL" clId="{5DF3A229-1965-414E-AF54-F4C37AC7DF68}" dt="2026-02-03T01:30:22.802" v="2287"/>
-        <pc:sldMkLst>
-          <pc:docMk/>
-          <pc:sldMk cId="1272123837" sldId="594"/>
-        </pc:sldMkLst>
-      </pc:sldChg>
-    </pc:docChg>
-  </pc:docChgLst>
-  <pc:docChgLst>
-    <pc:chgData name="Zhao Jin" userId="cd05a825-544c-438a-9ba1-08e63db50b47" providerId="ADAL" clId="{7346625B-7E8F-4E9B-A9F0-94C1DD70E907}"/>
-    <pc:docChg chg="modSld">
-      <pc:chgData name="Zhao Jin" userId="cd05a825-544c-438a-9ba1-08e63db50b47" providerId="ADAL" clId="{7346625B-7E8F-4E9B-A9F0-94C1DD70E907}" dt="2026-02-02T05:01:44.098" v="196" actId="20577"/>
-      <pc:docMkLst>
-        <pc:docMk/>
-      </pc:docMkLst>
-      <pc:sldChg chg="modSp mod">
-        <pc:chgData name="Zhao Jin" userId="cd05a825-544c-438a-9ba1-08e63db50b47" providerId="ADAL" clId="{7346625B-7E8F-4E9B-A9F0-94C1DD70E907}" dt="2026-02-02T04:59:16.586" v="137" actId="207"/>
-        <pc:sldMkLst>
-          <pc:docMk/>
-          <pc:sldMk cId="3792232794" sldId="504"/>
-        </pc:sldMkLst>
-        <pc:spChg chg="mod">
-          <ac:chgData name="Zhao Jin" userId="cd05a825-544c-438a-9ba1-08e63db50b47" providerId="ADAL" clId="{7346625B-7E8F-4E9B-A9F0-94C1DD70E907}" dt="2026-02-02T04:59:16.586" v="137" actId="207"/>
-          <ac:spMkLst>
-            <pc:docMk/>
-            <pc:sldMk cId="3792232794" sldId="504"/>
-            <ac:spMk id="7" creationId="{B96F2195-2780-84E7-B546-F7BD15A311AD}"/>
-          </ac:spMkLst>
-        </pc:spChg>
-        <pc:picChg chg="mod">
-          <ac:chgData name="Zhao Jin" userId="cd05a825-544c-438a-9ba1-08e63db50b47" providerId="ADAL" clId="{7346625B-7E8F-4E9B-A9F0-94C1DD70E907}" dt="2026-02-02T04:58:57.984" v="135" actId="1076"/>
-          <ac:picMkLst>
-            <pc:docMk/>
-            <pc:sldMk cId="3792232794" sldId="504"/>
-            <ac:picMk id="14337" creationId="{D293A2AC-E778-437B-BA92-2727B731B606}"/>
-          </ac:picMkLst>
-        </pc:picChg>
-      </pc:sldChg>
-      <pc:sldChg chg="delSp modSp mod">
-        <pc:chgData name="Zhao Jin" userId="cd05a825-544c-438a-9ba1-08e63db50b47" providerId="ADAL" clId="{7346625B-7E8F-4E9B-A9F0-94C1DD70E907}" dt="2026-02-02T04:59:58.543" v="175" actId="20577"/>
-        <pc:sldMkLst>
-          <pc:docMk/>
-          <pc:sldMk cId="1424500846" sldId="571"/>
-        </pc:sldMkLst>
-        <pc:spChg chg="mod">
-          <ac:chgData name="Zhao Jin" userId="cd05a825-544c-438a-9ba1-08e63db50b47" providerId="ADAL" clId="{7346625B-7E8F-4E9B-A9F0-94C1DD70E907}" dt="2026-02-02T04:59:58.543" v="175" actId="20577"/>
-          <ac:spMkLst>
-            <pc:docMk/>
-            <pc:sldMk cId="1424500846" sldId="571"/>
-            <ac:spMk id="7" creationId="{8C8FADF7-440E-7D9D-B20D-0E5311E63BDB}"/>
-          </ac:spMkLst>
-        </pc:spChg>
-        <pc:picChg chg="del">
-          <ac:chgData name="Zhao Jin" userId="cd05a825-544c-438a-9ba1-08e63db50b47" providerId="ADAL" clId="{7346625B-7E8F-4E9B-A9F0-94C1DD70E907}" dt="2026-02-02T04:59:08.041" v="136" actId="478"/>
-          <ac:picMkLst>
-            <pc:docMk/>
-            <pc:sldMk cId="1424500846" sldId="571"/>
-            <ac:picMk id="12" creationId="{67892E3E-CDFD-F485-8156-F0655D39626F}"/>
-          </ac:picMkLst>
-        </pc:picChg>
-      </pc:sldChg>
-      <pc:sldChg chg="delSp modSp mod">
-        <pc:chgData name="Zhao Jin" userId="cd05a825-544c-438a-9ba1-08e63db50b47" providerId="ADAL" clId="{7346625B-7E8F-4E9B-A9F0-94C1DD70E907}" dt="2026-02-02T05:01:07.065" v="184" actId="20577"/>
-        <pc:sldMkLst>
-          <pc:docMk/>
-          <pc:sldMk cId="1811060557" sldId="572"/>
-        </pc:sldMkLst>
-        <pc:spChg chg="mod">
-          <ac:chgData name="Zhao Jin" userId="cd05a825-544c-438a-9ba1-08e63db50b47" providerId="ADAL" clId="{7346625B-7E8F-4E9B-A9F0-94C1DD70E907}" dt="2026-02-02T05:01:07.065" v="184" actId="20577"/>
-          <ac:spMkLst>
-            <pc:docMk/>
-            <pc:sldMk cId="1811060557" sldId="572"/>
-            <ac:spMk id="7" creationId="{C99AD5EF-7BE8-E019-671B-ACFAF4461B50}"/>
-          </ac:spMkLst>
-        </pc:spChg>
-        <pc:picChg chg="del">
-          <ac:chgData name="Zhao Jin" userId="cd05a825-544c-438a-9ba1-08e63db50b47" providerId="ADAL" clId="{7346625B-7E8F-4E9B-A9F0-94C1DD70E907}" dt="2026-02-02T05:01:03.343" v="179" actId="478"/>
-          <ac:picMkLst>
-            <pc:docMk/>
-            <pc:sldMk cId="1811060557" sldId="572"/>
-            <ac:picMk id="4" creationId="{A66B3E35-9CAB-4E44-551A-A821B4293BE6}"/>
-          </ac:picMkLst>
-        </pc:picChg>
-      </pc:sldChg>
-      <pc:sldChg chg="delSp modSp mod">
-        <pc:chgData name="Zhao Jin" userId="cd05a825-544c-438a-9ba1-08e63db50b47" providerId="ADAL" clId="{7346625B-7E8F-4E9B-A9F0-94C1DD70E907}" dt="2026-02-02T05:01:44.098" v="196" actId="20577"/>
-        <pc:sldMkLst>
-          <pc:docMk/>
-          <pc:sldMk cId="3505552737" sldId="574"/>
-        </pc:sldMkLst>
-        <pc:spChg chg="mod">
-          <ac:chgData name="Zhao Jin" userId="cd05a825-544c-438a-9ba1-08e63db50b47" providerId="ADAL" clId="{7346625B-7E8F-4E9B-A9F0-94C1DD70E907}" dt="2026-02-02T05:01:44.098" v="196" actId="20577"/>
-          <ac:spMkLst>
-            <pc:docMk/>
-            <pc:sldMk cId="3505552737" sldId="574"/>
-            <ac:spMk id="7" creationId="{8B3A83A3-62BC-8F53-408A-ACBF3977E29D}"/>
-          </ac:spMkLst>
-        </pc:spChg>
-        <pc:picChg chg="del">
-          <ac:chgData name="Zhao Jin" userId="cd05a825-544c-438a-9ba1-08e63db50b47" providerId="ADAL" clId="{7346625B-7E8F-4E9B-A9F0-94C1DD70E907}" dt="2026-02-02T05:01:32.257" v="187" actId="478"/>
-          <ac:picMkLst>
-            <pc:docMk/>
-            <pc:sldMk cId="3505552737" sldId="574"/>
-            <ac:picMk id="4" creationId="{69F72204-B293-9C89-63A8-8ADCEB7D041B}"/>
-          </ac:picMkLst>
-        </pc:picChg>
       </pc:sldChg>
     </pc:docChg>
   </pc:docChgLst>
@@ -28332,7 +27179,7 @@
               <a:rPr lang="en-US" sz="2000" dirty="0">
                 <a:sym typeface="Wingdings" panose="05000000000000000000" pitchFamily="2" charset="2"/>
               </a:rPr>
-              <a:t> is between 1000-1400  output …</a:t>
+              <a:t> is between 1000-1400  output "T".</a:t>
             </a:r>
           </a:p>
           <a:p>
@@ -28396,7 +27243,7 @@
               <a:rPr lang="en-US" sz="2000" dirty="0">
                 <a:sym typeface="Wingdings" panose="05000000000000000000" pitchFamily="2" charset="2"/>
               </a:rPr>
-              <a:t> is between 1000-1200  output …</a:t>
+              <a:t> is between 1000-1200  output "L".</a:t>
             </a:r>
           </a:p>
           <a:p>
@@ -28418,7 +27265,7 @@
               <a:rPr lang="en-US" sz="2000" dirty="0">
                 <a:sym typeface="Wingdings" panose="05000000000000000000" pitchFamily="2" charset="2"/>
               </a:rPr>
-              <a:t>Otherwise, if …</a:t>
+              <a:t>Otherwise, output "-"</a:t>
             </a:r>
           </a:p>
           <a:p>

--- a/slides/Week4.pptx
+++ b/slides/Week4.pptx
@@ -227,8 +227,8 @@
 <file path=ppt/revisionInfo.xml><?xml version="1.0" encoding="utf-8"?>
 <p1510:revInfo xmlns:a="http://schemas.openxmlformats.org/drawingml/2006/main" xmlns:r="http://schemas.openxmlformats.org/officeDocument/2006/relationships" xmlns:p1510="http://schemas.microsoft.com/office/powerpoint/2015/10/main">
   <p1510:revLst>
-    <p1510:client id="{0C4B56B2-0AC9-419B-98B8-F2427D5261EE}" v="9" dt="2026-02-02T05:01:32.261"/>
-    <p1510:client id="{0E204528-26D7-4103-8B75-616A575D54A4}" v="386" dt="2026-02-03T04:08:38.868"/>
+    <p1510:client id="{0C4B56B2-0AC9-419B-98B8-F2427D5261EE}" v="61" dt="2026-02-09T04:24:05.317"/>
+    <p1510:client id="{0E204528-26D7-4103-8B75-616A575D54A4}" v="39" dt="2026-02-10T01:27:16.487"/>
   </p1510:revLst>
 </p1510:revInfo>
 </file>
@@ -237,23 +237,153 @@
 <pc:chgInfo xmlns:a="http://schemas.openxmlformats.org/drawingml/2006/main" xmlns:r="http://schemas.openxmlformats.org/officeDocument/2006/relationships" xmlns:ac="http://schemas.microsoft.com/office/drawing/2013/main/command" xmlns:pc="http://schemas.microsoft.com/office/powerpoint/2013/main/command">
   <pc:docChgLst>
     <pc:chgData name="Zhao Jin" userId="cd05a825-544c-438a-9ba1-08e63db50b47" providerId="ADAL" clId="{5DF3A229-1965-414E-AF54-F4C37AC7DF68}"/>
-    <pc:docChg chg="modSld">
-      <pc:chgData name="Zhao Jin" userId="cd05a825-544c-438a-9ba1-08e63db50b47" providerId="ADAL" clId="{5DF3A229-1965-414E-AF54-F4C37AC7DF68}" dt="2026-02-03T04:08:38.868" v="20"/>
+    <pc:docChg chg="custSel modSld">
+      <pc:chgData name="Zhao Jin" userId="cd05a825-544c-438a-9ba1-08e63db50b47" providerId="ADAL" clId="{5DF3A229-1965-414E-AF54-F4C37AC7DF68}" dt="2026-02-10T01:27:20.258" v="110" actId="207"/>
       <pc:docMkLst>
         <pc:docMk/>
       </pc:docMkLst>
+      <pc:sldChg chg="modSp">
+        <pc:chgData name="Zhao Jin" userId="cd05a825-544c-438a-9ba1-08e63db50b47" providerId="ADAL" clId="{5DF3A229-1965-414E-AF54-F4C37AC7DF68}" dt="2026-02-09T06:06:49.626" v="27" actId="20577"/>
+        <pc:sldMkLst>
+          <pc:docMk/>
+          <pc:sldMk cId="243231529" sldId="563"/>
+        </pc:sldMkLst>
+        <pc:spChg chg="mod">
+          <ac:chgData name="Zhao Jin" userId="cd05a825-544c-438a-9ba1-08e63db50b47" providerId="ADAL" clId="{5DF3A229-1965-414E-AF54-F4C37AC7DF68}" dt="2026-02-09T06:06:49.626" v="27" actId="20577"/>
+          <ac:spMkLst>
+            <pc:docMk/>
+            <pc:sldMk cId="243231529" sldId="563"/>
+            <ac:spMk id="15" creationId="{00000000-0000-0000-0000-000000000000}"/>
+          </ac:spMkLst>
+        </pc:spChg>
+      </pc:sldChg>
       <pc:sldChg chg="modSp modAnim">
-        <pc:chgData name="Zhao Jin" userId="cd05a825-544c-438a-9ba1-08e63db50b47" providerId="ADAL" clId="{5DF3A229-1965-414E-AF54-F4C37AC7DF68}" dt="2026-02-03T04:08:38.868" v="20"/>
+        <pc:chgData name="Zhao Jin" userId="cd05a825-544c-438a-9ba1-08e63db50b47" providerId="ADAL" clId="{5DF3A229-1965-414E-AF54-F4C37AC7DF68}" dt="2026-02-09T06:07:05.481" v="58" actId="20577"/>
         <pc:sldMkLst>
           <pc:docMk/>
           <pc:sldMk cId="29094273" sldId="564"/>
         </pc:sldMkLst>
         <pc:spChg chg="mod">
-          <ac:chgData name="Zhao Jin" userId="cd05a825-544c-438a-9ba1-08e63db50b47" providerId="ADAL" clId="{5DF3A229-1965-414E-AF54-F4C37AC7DF68}" dt="2026-02-03T04:08:38.868" v="20"/>
+          <ac:chgData name="Zhao Jin" userId="cd05a825-544c-438a-9ba1-08e63db50b47" providerId="ADAL" clId="{5DF3A229-1965-414E-AF54-F4C37AC7DF68}" dt="2026-02-09T06:07:05.481" v="58" actId="20577"/>
           <ac:spMkLst>
             <pc:docMk/>
             <pc:sldMk cId="29094273" sldId="564"/>
             <ac:spMk id="15" creationId="{A575D17D-3536-460E-088D-619F54BF1ECF}"/>
+          </ac:spMkLst>
+        </pc:spChg>
+      </pc:sldChg>
+      <pc:sldChg chg="modSp mod">
+        <pc:chgData name="Zhao Jin" userId="cd05a825-544c-438a-9ba1-08e63db50b47" providerId="ADAL" clId="{5DF3A229-1965-414E-AF54-F4C37AC7DF68}" dt="2026-02-09T06:07:23.818" v="79" actId="20577"/>
+        <pc:sldMkLst>
+          <pc:docMk/>
+          <pc:sldMk cId="4003524798" sldId="565"/>
+        </pc:sldMkLst>
+        <pc:spChg chg="mod">
+          <ac:chgData name="Zhao Jin" userId="cd05a825-544c-438a-9ba1-08e63db50b47" providerId="ADAL" clId="{5DF3A229-1965-414E-AF54-F4C37AC7DF68}" dt="2026-02-09T06:07:23.818" v="79" actId="20577"/>
+          <ac:spMkLst>
+            <pc:docMk/>
+            <pc:sldMk cId="4003524798" sldId="565"/>
+            <ac:spMk id="15" creationId="{F746E238-A1EF-3DEC-227A-53382854B07D}"/>
+          </ac:spMkLst>
+        </pc:spChg>
+      </pc:sldChg>
+      <pc:sldChg chg="modSp mod">
+        <pc:chgData name="Zhao Jin" userId="cd05a825-544c-438a-9ba1-08e63db50b47" providerId="ADAL" clId="{5DF3A229-1965-414E-AF54-F4C37AC7DF68}" dt="2026-02-10T01:27:20.258" v="110" actId="207"/>
+        <pc:sldMkLst>
+          <pc:docMk/>
+          <pc:sldMk cId="3194704825" sldId="591"/>
+        </pc:sldMkLst>
+        <pc:spChg chg="mod">
+          <ac:chgData name="Zhao Jin" userId="cd05a825-544c-438a-9ba1-08e63db50b47" providerId="ADAL" clId="{5DF3A229-1965-414E-AF54-F4C37AC7DF68}" dt="2026-02-10T01:27:20.258" v="110" actId="207"/>
+          <ac:spMkLst>
+            <pc:docMk/>
+            <pc:sldMk cId="3194704825" sldId="591"/>
+            <ac:spMk id="13" creationId="{11FE8A1E-D5F0-27BC-233F-FE7290546998}"/>
+          </ac:spMkLst>
+        </pc:spChg>
+      </pc:sldChg>
+    </pc:docChg>
+  </pc:docChgLst>
+  <pc:docChgLst>
+    <pc:chgData name="Zhao Jin" userId="cd05a825-544c-438a-9ba1-08e63db50b47" providerId="ADAL" clId="{7346625B-7E8F-4E9B-A9F0-94C1DD70E907}"/>
+    <pc:docChg chg="modSld">
+      <pc:chgData name="Zhao Jin" userId="cd05a825-544c-438a-9ba1-08e63db50b47" providerId="ADAL" clId="{7346625B-7E8F-4E9B-A9F0-94C1DD70E907}" dt="2026-02-09T07:20:03.703" v="71" actId="20577"/>
+      <pc:docMkLst>
+        <pc:docMk/>
+      </pc:docMkLst>
+      <pc:sldChg chg="modSp mod">
+        <pc:chgData name="Zhao Jin" userId="cd05a825-544c-438a-9ba1-08e63db50b47" providerId="ADAL" clId="{7346625B-7E8F-4E9B-A9F0-94C1DD70E907}" dt="2026-02-09T07:20:03.703" v="71" actId="20577"/>
+        <pc:sldMkLst>
+          <pc:docMk/>
+          <pc:sldMk cId="1067695719" sldId="526"/>
+        </pc:sldMkLst>
+        <pc:spChg chg="mod">
+          <ac:chgData name="Zhao Jin" userId="cd05a825-544c-438a-9ba1-08e63db50b47" providerId="ADAL" clId="{7346625B-7E8F-4E9B-A9F0-94C1DD70E907}" dt="2026-02-09T07:20:03.703" v="71" actId="20577"/>
+          <ac:spMkLst>
+            <pc:docMk/>
+            <pc:sldMk cId="1067695719" sldId="526"/>
+            <ac:spMk id="13" creationId="{00000000-0000-0000-0000-000000000000}"/>
+          </ac:spMkLst>
+        </pc:spChg>
+      </pc:sldChg>
+      <pc:sldChg chg="modSp mod">
+        <pc:chgData name="Zhao Jin" userId="cd05a825-544c-438a-9ba1-08e63db50b47" providerId="ADAL" clId="{7346625B-7E8F-4E9B-A9F0-94C1DD70E907}" dt="2026-02-09T04:22:34.731" v="59" actId="20577"/>
+        <pc:sldMkLst>
+          <pc:docMk/>
+          <pc:sldMk cId="1659983766" sldId="554"/>
+        </pc:sldMkLst>
+        <pc:spChg chg="mod">
+          <ac:chgData name="Zhao Jin" userId="cd05a825-544c-438a-9ba1-08e63db50b47" providerId="ADAL" clId="{7346625B-7E8F-4E9B-A9F0-94C1DD70E907}" dt="2026-02-09T04:22:34.731" v="59" actId="20577"/>
+          <ac:spMkLst>
+            <pc:docMk/>
+            <pc:sldMk cId="1659983766" sldId="554"/>
+            <ac:spMk id="49" creationId="{21EEE82A-4DB6-1D4F-9A03-5951F440FE93}"/>
+          </ac:spMkLst>
+        </pc:spChg>
+      </pc:sldChg>
+      <pc:sldChg chg="modSp mod">
+        <pc:chgData name="Zhao Jin" userId="cd05a825-544c-438a-9ba1-08e63db50b47" providerId="ADAL" clId="{7346625B-7E8F-4E9B-A9F0-94C1DD70E907}" dt="2026-02-09T04:24:05.317" v="61" actId="207"/>
+        <pc:sldMkLst>
+          <pc:docMk/>
+          <pc:sldMk cId="182578491" sldId="559"/>
+        </pc:sldMkLst>
+        <pc:spChg chg="mod">
+          <ac:chgData name="Zhao Jin" userId="cd05a825-544c-438a-9ba1-08e63db50b47" providerId="ADAL" clId="{7346625B-7E8F-4E9B-A9F0-94C1DD70E907}" dt="2026-02-09T04:24:05.317" v="61" actId="207"/>
+          <ac:spMkLst>
+            <pc:docMk/>
+            <pc:sldMk cId="182578491" sldId="559"/>
+            <ac:spMk id="28" creationId="{206BF097-CD0C-4B25-AF09-C35109612BC3}"/>
+          </ac:spMkLst>
+        </pc:spChg>
+        <pc:spChg chg="mod">
+          <ac:chgData name="Zhao Jin" userId="cd05a825-544c-438a-9ba1-08e63db50b47" providerId="ADAL" clId="{7346625B-7E8F-4E9B-A9F0-94C1DD70E907}" dt="2026-02-09T04:24:01.921" v="60" actId="207"/>
+          <ac:spMkLst>
+            <pc:docMk/>
+            <pc:sldMk cId="182578491" sldId="559"/>
+            <ac:spMk id="49" creationId="{21EEE82A-4DB6-1D4F-9A03-5951F440FE93}"/>
+          </ac:spMkLst>
+        </pc:spChg>
+        <pc:picChg chg="mod">
+          <ac:chgData name="Zhao Jin" userId="cd05a825-544c-438a-9ba1-08e63db50b47" providerId="ADAL" clId="{7346625B-7E8F-4E9B-A9F0-94C1DD70E907}" dt="2026-02-09T04:03:43.287" v="51" actId="167"/>
+          <ac:picMkLst>
+            <pc:docMk/>
+            <pc:sldMk cId="182578491" sldId="559"/>
+            <ac:picMk id="1026" creationId="{F8944A42-B2D9-76AF-B07D-1AA4828E88A9}"/>
+          </ac:picMkLst>
+        </pc:picChg>
+      </pc:sldChg>
+      <pc:sldChg chg="modSp mod">
+        <pc:chgData name="Zhao Jin" userId="cd05a825-544c-438a-9ba1-08e63db50b47" providerId="ADAL" clId="{7346625B-7E8F-4E9B-A9F0-94C1DD70E907}" dt="2026-02-09T07:19:47.241" v="66" actId="20577"/>
+        <pc:sldMkLst>
+          <pc:docMk/>
+          <pc:sldMk cId="3194704825" sldId="591"/>
+        </pc:sldMkLst>
+        <pc:spChg chg="mod">
+          <ac:chgData name="Zhao Jin" userId="cd05a825-544c-438a-9ba1-08e63db50b47" providerId="ADAL" clId="{7346625B-7E8F-4E9B-A9F0-94C1DD70E907}" dt="2026-02-09T07:19:47.241" v="66" actId="20577"/>
+          <ac:spMkLst>
+            <pc:docMk/>
+            <pc:sldMk cId="3194704825" sldId="591"/>
+            <ac:spMk id="13" creationId="{11FE8A1E-D5F0-27BC-233F-FE7290546998}"/>
           </ac:spMkLst>
         </pc:spChg>
       </pc:sldChg>
@@ -736,7 +866,7 @@
               <a:pPr>
                 <a:defRPr/>
               </a:pPr>
-              <a:t>2/3/2026</a:t>
+              <a:t>2/10/2026</a:t>
             </a:fld>
             <a:endParaRPr lang="en-US" dirty="0"/>
           </a:p>
@@ -12066,14 +12196,24 @@
               </a:tabLst>
             </a:pPr>
             <a:r>
-              <a:rPr lang="en-US" b="1" dirty="0">
+              <a:rPr lang="en-US" b="1">
                 <a:solidFill>
                   <a:schemeClr val="tx1"/>
                 </a:solidFill>
                 <a:latin typeface="Courier New" panose="02070309020205020404" pitchFamily="49" charset="0"/>
                 <a:cs typeface="Courier New" panose="02070309020205020404" pitchFamily="49" charset="0"/>
               </a:rPr>
-              <a:t>        answer = </a:t>
+              <a:t>      answer </a:t>
+            </a:r>
+            <a:r>
+              <a:rPr lang="en-US" b="1" dirty="0">
+                <a:solidFill>
+                  <a:schemeClr val="tx1"/>
+                </a:solidFill>
+                <a:latin typeface="Courier New" panose="02070309020205020404" pitchFamily="49" charset="0"/>
+                <a:cs typeface="Courier New" panose="02070309020205020404" pitchFamily="49" charset="0"/>
+              </a:rPr>
+              <a:t>= </a:t>
             </a:r>
             <a:r>
               <a:rPr lang="en-US" b="1" dirty="0">
@@ -12114,7 +12254,7 @@
                 <a:latin typeface="Courier New" panose="02070309020205020404" pitchFamily="49" charset="0"/>
                 <a:cs typeface="Courier New" panose="02070309020205020404" pitchFamily="49" charset="0"/>
               </a:rPr>
-              <a:t>    } </a:t>
+              <a:t>  } </a:t>
             </a:r>
             <a:r>
               <a:rPr lang="en-US" b="1" dirty="0">
@@ -12155,7 +12295,7 @@
                 <a:latin typeface="Courier New" panose="02070309020205020404" pitchFamily="49" charset="0"/>
                 <a:cs typeface="Courier New" panose="02070309020205020404" pitchFamily="49" charset="0"/>
               </a:rPr>
-              <a:t>        answer = n * factorial(n - </a:t>
+              <a:t>      answer = n * factorial(n - </a:t>
             </a:r>
             <a:r>
               <a:rPr lang="en-US" b="1" dirty="0">
@@ -12196,7 +12336,7 @@
                 <a:latin typeface="Courier New" panose="02070309020205020404" pitchFamily="49" charset="0"/>
                 <a:cs typeface="Courier New" panose="02070309020205020404" pitchFamily="49" charset="0"/>
               </a:rPr>
-              <a:t>    }</a:t>
+              <a:t>  }</a:t>
             </a:r>
           </a:p>
         </p:txBody>
@@ -14397,6 +14537,51 @@
           <a:chExt cx="0" cy="0"/>
         </a:xfrm>
       </p:grpSpPr>
+      <p:pic>
+        <p:nvPicPr>
+          <p:cNvPr id="1026" name="Picture 2" descr="flowchart">
+            <a:extLst>
+              <a:ext uri="{FF2B5EF4-FFF2-40B4-BE49-F238E27FC236}">
+                <a16:creationId xmlns:a16="http://schemas.microsoft.com/office/drawing/2014/main" id="{F8944A42-B2D9-76AF-B07D-1AA4828E88A9}"/>
+              </a:ext>
+            </a:extLst>
+          </p:cNvPr>
+          <p:cNvPicPr>
+            <a:picLocks noChangeAspect="1" noChangeArrowheads="1"/>
+          </p:cNvPicPr>
+          <p:nvPr/>
+        </p:nvPicPr>
+        <p:blipFill rotWithShape="1">
+          <a:blip r:embed="rId3" cstate="print">
+            <a:extLst>
+              <a:ext uri="{28A0092B-C50C-407E-A947-70E740481C1C}">
+                <a14:useLocalDpi xmlns:a14="http://schemas.microsoft.com/office/drawing/2010/main" val="0"/>
+              </a:ext>
+            </a:extLst>
+          </a:blip>
+          <a:srcRect l="21944" t="23674" r="23454" b="18265"/>
+          <a:stretch/>
+        </p:blipFill>
+        <p:spPr bwMode="auto">
+          <a:xfrm>
+            <a:off x="4245712" y="1315138"/>
+            <a:ext cx="4157776" cy="1727032"/>
+          </a:xfrm>
+          <a:prstGeom prst="rect">
+            <a:avLst/>
+          </a:prstGeom>
+          <a:noFill/>
+          <a:extLst>
+            <a:ext uri="{909E8E84-426E-40DD-AFC4-6F175D3DCCD1}">
+              <a14:hiddenFill xmlns:a14="http://schemas.microsoft.com/office/drawing/2010/main">
+                <a:solidFill>
+                  <a:srgbClr val="FFFFFF"/>
+                </a:solidFill>
+              </a14:hiddenFill>
+            </a:ext>
+          </a:extLst>
+        </p:spPr>
+      </p:pic>
       <p:sp>
         <p:nvSpPr>
           <p:cNvPr id="14338" name="Rectangle 2"/>
@@ -14455,7 +14640,7 @@
         <p:spPr>
           <a:xfrm>
             <a:off x="587376" y="1302555"/>
-            <a:ext cx="3432363" cy="1754326"/>
+            <a:ext cx="3754849" cy="1754326"/>
           </a:xfrm>
           <a:prstGeom prst="rect">
             <a:avLst/>
@@ -14516,7 +14701,27 @@
                 <a:latin typeface="Courier New" panose="02070309020205020404" pitchFamily="49" charset="0"/>
                 <a:cs typeface="Courier New" panose="02070309020205020404" pitchFamily="49" charset="0"/>
               </a:rPr>
-              <a:t> (v &lt; 0) {</a:t>
+              <a:t> (v &lt; </a:t>
+            </a:r>
+            <a:r>
+              <a:rPr lang="en-US" b="1" dirty="0">
+                <a:solidFill>
+                  <a:srgbClr val="C00000"/>
+                </a:solidFill>
+                <a:latin typeface="Courier New" panose="02070309020205020404" pitchFamily="49" charset="0"/>
+                <a:cs typeface="Courier New" panose="02070309020205020404" pitchFamily="49" charset="0"/>
+              </a:rPr>
+              <a:t>0</a:t>
+            </a:r>
+            <a:r>
+              <a:rPr lang="en-US" b="1" dirty="0">
+                <a:solidFill>
+                  <a:schemeClr val="tx1"/>
+                </a:solidFill>
+                <a:latin typeface="Courier New" panose="02070309020205020404" pitchFamily="49" charset="0"/>
+                <a:cs typeface="Courier New" panose="02070309020205020404" pitchFamily="49" charset="0"/>
+              </a:rPr>
+              <a:t>) {</a:t>
             </a:r>
           </a:p>
           <a:p>
@@ -14547,7 +14752,7 @@
                 <a:latin typeface="Courier New" panose="02070309020205020404" pitchFamily="49" charset="0"/>
                 <a:cs typeface="Courier New" panose="02070309020205020404" pitchFamily="49" charset="0"/>
               </a:rPr>
-              <a:t>// update v</a:t>
+              <a:t>// flip the sign </a:t>
             </a:r>
           </a:p>
           <a:p>
@@ -14681,7 +14886,7 @@
         <p:spPr>
           <a:xfrm>
             <a:off x="437953" y="4144444"/>
-            <a:ext cx="3581784" cy="1200329"/>
+            <a:ext cx="3904272" cy="1200329"/>
           </a:xfrm>
           <a:prstGeom prst="rect">
             <a:avLst/>
@@ -14742,7 +14947,27 @@
                 <a:latin typeface="Courier New" panose="02070309020205020404" pitchFamily="49" charset="0"/>
                 <a:cs typeface="Courier New" panose="02070309020205020404" pitchFamily="49" charset="0"/>
               </a:rPr>
-              <a:t> (v &lt; 0) {</a:t>
+              <a:t> (v &lt; </a:t>
+            </a:r>
+            <a:r>
+              <a:rPr lang="en-US" b="1" dirty="0">
+                <a:solidFill>
+                  <a:srgbClr val="C00000"/>
+                </a:solidFill>
+                <a:latin typeface="Courier New" panose="02070309020205020404" pitchFamily="49" charset="0"/>
+                <a:cs typeface="Courier New" panose="02070309020205020404" pitchFamily="49" charset="0"/>
+              </a:rPr>
+              <a:t>0</a:t>
+            </a:r>
+            <a:r>
+              <a:rPr lang="en-US" b="1" dirty="0">
+                <a:solidFill>
+                  <a:schemeClr val="tx1"/>
+                </a:solidFill>
+                <a:latin typeface="Courier New" panose="02070309020205020404" pitchFamily="49" charset="0"/>
+                <a:cs typeface="Courier New" panose="02070309020205020404" pitchFamily="49" charset="0"/>
+              </a:rPr>
+              <a:t>) {</a:t>
             </a:r>
           </a:p>
           <a:p>
@@ -14773,7 +14998,7 @@
                 <a:latin typeface="Courier New" panose="02070309020205020404" pitchFamily="49" charset="0"/>
                 <a:cs typeface="Courier New" panose="02070309020205020404" pitchFamily="49" charset="0"/>
               </a:rPr>
-              <a:t>// update m</a:t>
+              <a:t>// flip the sign</a:t>
             </a:r>
           </a:p>
           <a:p>
@@ -15386,51 +15611,6 @@
           </a:p>
         </p:txBody>
       </p:sp>
-      <p:pic>
-        <p:nvPicPr>
-          <p:cNvPr id="1026" name="Picture 2" descr="flowchart">
-            <a:extLst>
-              <a:ext uri="{FF2B5EF4-FFF2-40B4-BE49-F238E27FC236}">
-                <a16:creationId xmlns:a16="http://schemas.microsoft.com/office/drawing/2014/main" id="{F8944A42-B2D9-76AF-B07D-1AA4828E88A9}"/>
-              </a:ext>
-            </a:extLst>
-          </p:cNvPr>
-          <p:cNvPicPr>
-            <a:picLocks noChangeAspect="1" noChangeArrowheads="1"/>
-          </p:cNvPicPr>
-          <p:nvPr/>
-        </p:nvPicPr>
-        <p:blipFill rotWithShape="1">
-          <a:blip r:embed="rId3" cstate="print">
-            <a:extLst>
-              <a:ext uri="{28A0092B-C50C-407E-A947-70E740481C1C}">
-                <a14:useLocalDpi xmlns:a14="http://schemas.microsoft.com/office/drawing/2010/main" val="0"/>
-              </a:ext>
-            </a:extLst>
-          </a:blip>
-          <a:srcRect l="21944" t="23674" r="23454" b="18265"/>
-          <a:stretch/>
-        </p:blipFill>
-        <p:spPr bwMode="auto">
-          <a:xfrm>
-            <a:off x="4245712" y="1315138"/>
-            <a:ext cx="4157776" cy="1727032"/>
-          </a:xfrm>
-          <a:prstGeom prst="rect">
-            <a:avLst/>
-          </a:prstGeom>
-          <a:noFill/>
-          <a:extLst>
-            <a:ext uri="{909E8E84-426E-40DD-AFC4-6F175D3DCCD1}">
-              <a14:hiddenFill xmlns:a14="http://schemas.microsoft.com/office/drawing/2010/main">
-                <a:solidFill>
-                  <a:srgbClr val="FFFFFF"/>
-                </a:solidFill>
-              </a14:hiddenFill>
-            </a:ext>
-          </a:extLst>
-        </p:spPr>
-      </p:pic>
       <p:sp>
         <p:nvSpPr>
           <p:cNvPr id="5" name="Rectangle 4">
@@ -25442,7 +25622,7 @@
               <a:rPr lang="en-US" sz="2000" dirty="0">
                 <a:sym typeface="Wingdings" panose="05000000000000000000" pitchFamily="2" charset="2"/>
               </a:rPr>
-              <a:t>is between 1000-1400  …</a:t>
+              <a:t>is before 1400  …</a:t>
             </a:r>
           </a:p>
           <a:p>
@@ -27179,7 +27359,7 @@
               <a:rPr lang="en-US" sz="2000" dirty="0">
                 <a:sym typeface="Wingdings" panose="05000000000000000000" pitchFamily="2" charset="2"/>
               </a:rPr>
-              <a:t> is between 1000-1400  output "T".</a:t>
+              <a:t> is before 1400  output "T".</a:t>
             </a:r>
           </a:p>
           <a:p>
@@ -27243,7 +27423,7 @@
               <a:rPr lang="en-US" sz="2000" dirty="0">
                 <a:sym typeface="Wingdings" panose="05000000000000000000" pitchFamily="2" charset="2"/>
               </a:rPr>
-              <a:t> is between 1000-1200  output "L".</a:t>
+              <a:t> is before 1200  output "L".</a:t>
             </a:r>
           </a:p>
           <a:p>
@@ -28796,14 +28976,26 @@
                 </a:solidFill>
                 <a:sym typeface="Wingdings" panose="05000000000000000000" pitchFamily="2" charset="2"/>
               </a:rPr>
-              <a:t> time</a:t>
-            </a:r>
-            <a:r>
-              <a:rPr lang="en-US" sz="2000" dirty="0">
+              <a:t> </a:t>
+            </a:r>
+            <a:r>
+              <a:rPr lang="en-US" sz="2000">
+                <a:solidFill>
+                  <a:srgbClr val="0000FF"/>
+                </a:solidFill>
                 <a:sym typeface="Wingdings" panose="05000000000000000000" pitchFamily="2" charset="2"/>
               </a:rPr>
-              <a:t> is 1400 or higher …</a:t>
-            </a:r>
+              <a:t>time</a:t>
+            </a:r>
+            <a:r>
+              <a:rPr lang="en-US" sz="2000">
+                <a:sym typeface="Wingdings" panose="05000000000000000000" pitchFamily="2" charset="2"/>
+              </a:rPr>
+              <a:t> after 1400…</a:t>
+            </a:r>
+            <a:endParaRPr lang="en-US" sz="2000" dirty="0">
+              <a:sym typeface="Wingdings" panose="05000000000000000000" pitchFamily="2" charset="2"/>
+            </a:endParaRPr>
           </a:p>
           <a:p>
             <a:pPr marL="800100" lvl="1" indent="-342900">
@@ -48721,7 +48913,7 @@
             </a:pPr>
             <a:r>
               <a:rPr lang="en-US" sz="2000" dirty="0"/>
-              <a:t>Lecture 4 (due </a:t>
+              <a:t>Lecture 4: due </a:t>
             </a:r>
             <a:r>
               <a:rPr lang="en-US" sz="2000" dirty="0">
@@ -48733,7 +48925,7 @@
             </a:r>
             <a:r>
               <a:rPr lang="en-US" sz="2000" dirty="0"/>
-              <a:t>)</a:t>
+              <a:t> (extended due to PE0)</a:t>
             </a:r>
           </a:p>
           <a:p>
@@ -48835,7 +49027,11 @@
                   <a:srgbClr val="0000FF"/>
                 </a:solidFill>
               </a:rPr>
-              <a:t>13 Feb, 2pm</a:t>
+              <a:t>13 Feb, 2pm </a:t>
+            </a:r>
+            <a:r>
+              <a:rPr lang="en-US" sz="2000" dirty="0"/>
+              <a:t>(extended due to PE0)</a:t>
             </a:r>
           </a:p>
           <a:p>
@@ -49215,32 +49411,17 @@
             </a:pPr>
             <a:r>
               <a:rPr lang="en-US" sz="2000" dirty="0"/>
-              <a:t>Timing for makeup lecture in Week 6 (</a:t>
-            </a:r>
-            <a:r>
-              <a:rPr lang="en-US" sz="2000"/>
-              <a:t>due </a:t>
-            </a:r>
-            <a:r>
-              <a:rPr lang="en-US" sz="2000">
+              <a:t>Timing for makeup lecture in Week 6: due </a:t>
+            </a:r>
+            <a:r>
+              <a:rPr lang="en-US" sz="2000" dirty="0">
                 <a:solidFill>
                   <a:srgbClr val="0000FF"/>
                 </a:solidFill>
               </a:rPr>
-              <a:t>13 </a:t>
-            </a:r>
-            <a:r>
-              <a:rPr lang="en-US" sz="2000" dirty="0">
-                <a:solidFill>
-                  <a:srgbClr val="0000FF"/>
-                </a:solidFill>
-              </a:rPr>
-              <a:t>Feb, 2pm</a:t>
-            </a:r>
-            <a:r>
-              <a:rPr lang="en-US" sz="2000" dirty="0"/>
-              <a:t>)</a:t>
-            </a:r>
+              <a:t>13 Feb, 2pm</a:t>
+            </a:r>
+            <a:endParaRPr lang="en-US" sz="2000" dirty="0"/>
           </a:p>
           <a:p>
             <a:pPr marL="800100" lvl="1" indent="-342900">
